--- a/NEA/Recorded Lectures/1426774_81212_rl2.2.2.pptx
+++ b/NEA/Recorded Lectures/1426774_81212_rl2.2.2.pptx
@@ -5,25 +5,24 @@
     <p:sldMasterId id="2147483668" r:id="rId1"/>
   </p:sldMasterIdLst>
   <p:notesMasterIdLst>
-    <p:notesMasterId r:id="rId15"/>
+    <p:notesMasterId r:id="rId14"/>
   </p:notesMasterIdLst>
   <p:handoutMasterIdLst>
-    <p:handoutMasterId r:id="rId16"/>
+    <p:handoutMasterId r:id="rId15"/>
   </p:handoutMasterIdLst>
   <p:sldIdLst>
-    <p:sldId id="256" r:id="rId2"/>
-    <p:sldId id="287" r:id="rId3"/>
-    <p:sldId id="295" r:id="rId4"/>
-    <p:sldId id="296" r:id="rId5"/>
-    <p:sldId id="298" r:id="rId6"/>
-    <p:sldId id="299" r:id="rId7"/>
-    <p:sldId id="300" r:id="rId8"/>
-    <p:sldId id="301" r:id="rId9"/>
-    <p:sldId id="302" r:id="rId10"/>
-    <p:sldId id="303" r:id="rId11"/>
-    <p:sldId id="304" r:id="rId12"/>
-    <p:sldId id="306" r:id="rId13"/>
-    <p:sldId id="305" r:id="rId14"/>
+    <p:sldId id="287" r:id="rId2"/>
+    <p:sldId id="295" r:id="rId3"/>
+    <p:sldId id="296" r:id="rId4"/>
+    <p:sldId id="298" r:id="rId5"/>
+    <p:sldId id="299" r:id="rId6"/>
+    <p:sldId id="300" r:id="rId7"/>
+    <p:sldId id="301" r:id="rId8"/>
+    <p:sldId id="302" r:id="rId9"/>
+    <p:sldId id="303" r:id="rId10"/>
+    <p:sldId id="304" r:id="rId11"/>
+    <p:sldId id="306" r:id="rId12"/>
+    <p:sldId id="305" r:id="rId13"/>
   </p:sldIdLst>
   <p:sldSz cx="9144000" cy="6858000" type="screen4x3"/>
   <p:notesSz cx="6805613" cy="9944100"/>
@@ -240,10 +239,6 @@
 </p:presentation>
 </file>
 
-<file path=ppt/revisionInfo.xml><?xml version="1.0" encoding="utf-8"?>
-<p1510:revInfo xmlns:a="http://schemas.openxmlformats.org/drawingml/2006/main" xmlns:r="http://schemas.openxmlformats.org/officeDocument/2006/relationships" xmlns:p1510="http://schemas.microsoft.com/office/powerpoint/2015/10/main"/>
-</file>
-
 <file path=ppt/handoutMasters/handoutMaster1.xml><?xml version="1.0" encoding="utf-8"?>
 <p:handoutMaster xmlns:a="http://schemas.openxmlformats.org/drawingml/2006/main" xmlns:r="http://schemas.openxmlformats.org/officeDocument/2006/relationships" xmlns:p="http://schemas.openxmlformats.org/presentationml/2006/main">
   <p:cSld>
@@ -326,7 +321,7 @@
           <a:p>
             <a:fld id="{73BE9B4E-3786-43E4-ADC0-DE2945E09898}" type="datetimeFigureOut">
               <a:rPr lang="en-IN" smtClean="0"/>
-              <a:t>03-08-2017</a:t>
+              <a:t>17-04-2025</a:t>
             </a:fld>
             <a:endParaRPr lang="en-IN"/>
           </a:p>
@@ -987,851 +982,7 @@
 </p:notesMaster>
 </file>
 
-<file path=ppt/notesSlides/notesSlide1.xml><?xml version="1.0" encoding="utf-8"?>
-<p:notes xmlns:a="http://schemas.openxmlformats.org/drawingml/2006/main" xmlns:r="http://schemas.openxmlformats.org/officeDocument/2006/relationships" xmlns:p="http://schemas.openxmlformats.org/presentationml/2006/main" showMasterSp="0" showMasterPhAnim="0">
-  <p:cSld>
-    <p:spTree>
-      <p:nvGrpSpPr>
-        <p:cNvPr id="1" name="Shape 239"/>
-        <p:cNvGrpSpPr/>
-        <p:nvPr/>
-      </p:nvGrpSpPr>
-      <p:grpSpPr>
-        <a:xfrm>
-          <a:off x="0" y="0"/>
-          <a:ext cx="0" cy="0"/>
-          <a:chOff x="0" y="0"/>
-          <a:chExt cx="0" cy="0"/>
-        </a:xfrm>
-      </p:grpSpPr>
-      <p:sp>
-        <p:nvSpPr>
-          <p:cNvPr id="240" name="Shape 240"/>
-          <p:cNvSpPr>
-            <a:spLocks noGrp="1" noRot="1" noChangeAspect="1"/>
-          </p:cNvSpPr>
-          <p:nvPr>
-            <p:ph type="sldImg" idx="2"/>
-          </p:nvPr>
-        </p:nvSpPr>
-        <p:spPr>
-          <a:xfrm>
-            <a:off x="917575" y="746125"/>
-            <a:ext cx="4972050" cy="3729038"/>
-          </a:xfrm>
-          <a:custGeom>
-            <a:avLst/>
-            <a:gdLst/>
-            <a:ahLst/>
-            <a:cxnLst/>
-            <a:rect l="0" t="0" r="0" b="0"/>
-            <a:pathLst>
-              <a:path w="120000" h="120000" extrusionOk="0">
-                <a:moveTo>
-                  <a:pt x="0" y="0"/>
-                </a:moveTo>
-                <a:lnTo>
-                  <a:pt x="120000" y="0"/>
-                </a:lnTo>
-                <a:lnTo>
-                  <a:pt x="120000" y="120000"/>
-                </a:lnTo>
-                <a:lnTo>
-                  <a:pt x="0" y="120000"/>
-                </a:lnTo>
-                <a:close/>
-              </a:path>
-            </a:pathLst>
-          </a:custGeom>
-          <a:noFill/>
-          <a:ln w="12700" cap="flat" cmpd="sng">
-            <a:solidFill>
-              <a:srgbClr val="000000"/>
-            </a:solidFill>
-            <a:prstDash val="solid"/>
-            <a:round/>
-            <a:headEnd type="none" w="med" len="med"/>
-            <a:tailEnd type="none" w="med" len="med"/>
-          </a:ln>
-        </p:spPr>
-      </p:sp>
-      <p:sp>
-        <p:nvSpPr>
-          <p:cNvPr id="241" name="Shape 241"/>
-          <p:cNvSpPr txBox="1">
-            <a:spLocks noGrp="1"/>
-          </p:cNvSpPr>
-          <p:nvPr>
-            <p:ph type="body" idx="1"/>
-          </p:nvPr>
-        </p:nvSpPr>
-        <p:spPr>
-          <a:xfrm>
-            <a:off x="680562" y="4723448"/>
-            <a:ext cx="5444489" cy="4474845"/>
-          </a:xfrm>
-          <a:prstGeom prst="rect">
-            <a:avLst/>
-          </a:prstGeom>
-          <a:noFill/>
-          <a:ln>
-            <a:noFill/>
-          </a:ln>
-        </p:spPr>
-        <p:txBody>
-          <a:bodyPr lIns="91425" tIns="45700" rIns="91425" bIns="45700" anchor="t" anchorCtr="0">
-            <a:noAutofit/>
-          </a:bodyPr>
-          <a:lstStyle/>
-          <a:p>
-            <a:pPr marL="0" marR="0" lvl="0" indent="0" algn="l" rtl="0">
-              <a:spcBef>
-                <a:spcPts val="0"/>
-              </a:spcBef>
-              <a:buSzPct val="25000"/>
-              <a:buNone/>
-            </a:pPr>
-            <a:endParaRPr sz="1200" b="0" i="0" u="none" strike="noStrike" cap="none">
-              <a:solidFill>
-                <a:schemeClr val="dk1"/>
-              </a:solidFill>
-              <a:latin typeface="Calibri"/>
-              <a:ea typeface="Calibri"/>
-              <a:cs typeface="Calibri"/>
-              <a:sym typeface="Calibri"/>
-            </a:endParaRPr>
-          </a:p>
-        </p:txBody>
-      </p:sp>
-      <p:sp>
-        <p:nvSpPr>
-          <p:cNvPr id="242" name="Shape 242"/>
-          <p:cNvSpPr txBox="1">
-            <a:spLocks noGrp="1"/>
-          </p:cNvSpPr>
-          <p:nvPr>
-            <p:ph type="sldNum" idx="12"/>
-          </p:nvPr>
-        </p:nvSpPr>
-        <p:spPr>
-          <a:xfrm>
-            <a:off x="3854939" y="9445168"/>
-            <a:ext cx="2949099" cy="497205"/>
-          </a:xfrm>
-          <a:prstGeom prst="rect">
-            <a:avLst/>
-          </a:prstGeom>
-          <a:noFill/>
-          <a:ln>
-            <a:noFill/>
-          </a:ln>
-        </p:spPr>
-        <p:txBody>
-          <a:bodyPr lIns="91425" tIns="45700" rIns="91425" bIns="45700" anchor="b" anchorCtr="0">
-            <a:noAutofit/>
-          </a:bodyPr>
-          <a:lstStyle/>
-          <a:p>
-            <a:pPr marL="0" marR="0" lvl="0" indent="0" algn="r" rtl="0">
-              <a:spcBef>
-                <a:spcPts val="0"/>
-              </a:spcBef>
-              <a:buSzPct val="25000"/>
-              <a:buNone/>
-            </a:pPr>
-            <a:fld id="{00000000-1234-1234-1234-123412341234}" type="slidenum">
-              <a:rPr lang="en-US" sz="1200" b="0" i="0" u="none" strike="noStrike" cap="none">
-                <a:solidFill>
-                  <a:srgbClr val="000000"/>
-                </a:solidFill>
-                <a:latin typeface="Calibri"/>
-                <a:ea typeface="Calibri"/>
-                <a:cs typeface="Calibri"/>
-                <a:sym typeface="Calibri"/>
-              </a:rPr>
-              <a:t>1</a:t>
-            </a:fld>
-            <a:endParaRPr lang="en-US" sz="1200" b="0" i="0" u="none" strike="noStrike" cap="none">
-              <a:solidFill>
-                <a:srgbClr val="000000"/>
-              </a:solidFill>
-              <a:latin typeface="Calibri"/>
-              <a:ea typeface="Calibri"/>
-              <a:cs typeface="Calibri"/>
-              <a:sym typeface="Calibri"/>
-            </a:endParaRPr>
-          </a:p>
-        </p:txBody>
-      </p:sp>
-    </p:spTree>
-  </p:cSld>
-  <p:clrMapOvr>
-    <a:masterClrMapping/>
-  </p:clrMapOvr>
-</p:notes>
-</file>
-
 <file path=ppt/slideLayouts/slideLayout1.xml><?xml version="1.0" encoding="utf-8"?>
-<p:sldLayout xmlns:a="http://schemas.openxmlformats.org/drawingml/2006/main" xmlns:r="http://schemas.openxmlformats.org/officeDocument/2006/relationships" xmlns:p="http://schemas.openxmlformats.org/presentationml/2006/main">
-  <p:cSld name="Custom Layout">
-    <p:spTree>
-      <p:nvGrpSpPr>
-        <p:cNvPr id="1" name="Shape 188"/>
-        <p:cNvGrpSpPr/>
-        <p:nvPr/>
-      </p:nvGrpSpPr>
-      <p:grpSpPr>
-        <a:xfrm>
-          <a:off x="0" y="0"/>
-          <a:ext cx="0" cy="0"/>
-          <a:chOff x="0" y="0"/>
-          <a:chExt cx="0" cy="0"/>
-        </a:xfrm>
-      </p:grpSpPr>
-      <p:pic>
-        <p:nvPicPr>
-          <p:cNvPr id="189" name="Shape 189" descr="\\Server\D\jyoti\FI023_BITS_v1\styleguide img\IMG_5627_b.jpg"/>
-          <p:cNvPicPr preferRelativeResize="0"/>
-          <p:nvPr/>
-        </p:nvPicPr>
-        <p:blipFill rotWithShape="1">
-          <a:blip r:embed="rId2">
-            <a:alphaModFix/>
-          </a:blip>
-          <a:srcRect/>
-          <a:stretch/>
-        </p:blipFill>
-        <p:spPr>
-          <a:xfrm>
-            <a:off x="15" y="17"/>
-            <a:ext cx="9142380" cy="6882117"/>
-          </a:xfrm>
-          <a:prstGeom prst="rect">
-            <a:avLst/>
-          </a:prstGeom>
-          <a:noFill/>
-          <a:ln>
-            <a:noFill/>
-          </a:ln>
-        </p:spPr>
-      </p:pic>
-      <p:sp>
-        <p:nvSpPr>
-          <p:cNvPr id="190" name="Shape 190"/>
-          <p:cNvSpPr/>
-          <p:nvPr/>
-        </p:nvSpPr>
-        <p:spPr>
-          <a:xfrm>
-            <a:off x="0" y="4253985"/>
-            <a:ext cx="9144000" cy="2628136"/>
-          </a:xfrm>
-          <a:prstGeom prst="rect">
-            <a:avLst/>
-          </a:prstGeom>
-          <a:solidFill>
-            <a:schemeClr val="lt1"/>
-          </a:solidFill>
-          <a:ln>
-            <a:noFill/>
-          </a:ln>
-        </p:spPr>
-        <p:txBody>
-          <a:bodyPr lIns="93125" tIns="46550" rIns="93125" bIns="46550" anchor="ctr" anchorCtr="0">
-            <a:noAutofit/>
-          </a:bodyPr>
-          <a:lstStyle/>
-          <a:p>
-            <a:pPr marL="0" marR="0" lvl="0" indent="0" algn="ctr" rtl="0">
-              <a:spcBef>
-                <a:spcPts val="0"/>
-              </a:spcBef>
-              <a:spcAft>
-                <a:spcPts val="0"/>
-              </a:spcAft>
-              <a:buNone/>
-            </a:pPr>
-            <a:endParaRPr sz="1600" b="0" i="0" u="none" strike="noStrike" cap="none">
-              <a:solidFill>
-                <a:srgbClr val="FFFFFF"/>
-              </a:solidFill>
-              <a:latin typeface="Arial"/>
-              <a:ea typeface="Arial"/>
-              <a:cs typeface="Arial"/>
-              <a:sym typeface="Arial"/>
-            </a:endParaRPr>
-          </a:p>
-        </p:txBody>
-      </p:sp>
-      <p:pic>
-        <p:nvPicPr>
-          <p:cNvPr id="191" name="Shape 191" descr="Picture 7.png"/>
-          <p:cNvPicPr preferRelativeResize="0"/>
-          <p:nvPr/>
-        </p:nvPicPr>
-        <p:blipFill rotWithShape="1">
-          <a:blip r:embed="rId3">
-            <a:alphaModFix/>
-          </a:blip>
-          <a:srcRect l="1923" b="5335"/>
-          <a:stretch/>
-        </p:blipFill>
-        <p:spPr>
-          <a:xfrm>
-            <a:off x="6764470" y="15"/>
-            <a:ext cx="2237873" cy="706766"/>
-          </a:xfrm>
-          <a:prstGeom prst="rect">
-            <a:avLst/>
-          </a:prstGeom>
-          <a:noFill/>
-          <a:ln>
-            <a:noFill/>
-          </a:ln>
-        </p:spPr>
-      </p:pic>
-      <p:grpSp>
-        <p:nvGrpSpPr>
-          <p:cNvPr id="195" name="Shape 195"/>
-          <p:cNvGrpSpPr/>
-          <p:nvPr/>
-        </p:nvGrpSpPr>
-        <p:grpSpPr>
-          <a:xfrm>
-            <a:off x="6778635" y="691752"/>
-            <a:ext cx="2254818" cy="699729"/>
-            <a:chOff x="76200" y="2209800"/>
-            <a:chExt cx="2209799" cy="685799"/>
-          </a:xfrm>
-        </p:grpSpPr>
-        <p:sp>
-          <p:nvSpPr>
-            <p:cNvPr id="196" name="Shape 196"/>
-            <p:cNvSpPr txBox="1"/>
-            <p:nvPr/>
-          </p:nvSpPr>
-          <p:spPr>
-            <a:xfrm>
-              <a:off x="76200" y="2209800"/>
-              <a:ext cx="2209799" cy="553997"/>
-            </a:xfrm>
-            <a:prstGeom prst="rect">
-              <a:avLst/>
-            </a:prstGeom>
-            <a:noFill/>
-            <a:ln>
-              <a:noFill/>
-            </a:ln>
-          </p:spPr>
-          <p:txBody>
-            <a:bodyPr lIns="91425" tIns="45700" rIns="91425" bIns="45700" anchor="t" anchorCtr="0">
-              <a:noAutofit/>
-            </a:bodyPr>
-            <a:lstStyle/>
-            <a:p>
-              <a:pPr marL="0" marR="0" lvl="0" indent="0" algn="ctr" rtl="0">
-                <a:spcBef>
-                  <a:spcPts val="0"/>
-                </a:spcBef>
-                <a:spcAft>
-                  <a:spcPts val="0"/>
-                </a:spcAft>
-                <a:buSzPct val="25000"/>
-                <a:buNone/>
-              </a:pPr>
-              <a:r>
-                <a:rPr lang="en-US" sz="3000" b="1" i="0" u="none" strike="noStrike" cap="none" dirty="0">
-                  <a:solidFill>
-                    <a:srgbClr val="FFFFFF"/>
-                  </a:solidFill>
-                  <a:latin typeface="Arial"/>
-                  <a:ea typeface="Arial"/>
-                  <a:cs typeface="Arial"/>
-                  <a:sym typeface="Arial"/>
-                </a:rPr>
-                <a:t>BITS</a:t>
-              </a:r>
-              <a:r>
-                <a:rPr lang="en-US" sz="3000" b="0" i="0" u="none" strike="noStrike" cap="none" dirty="0">
-                  <a:solidFill>
-                    <a:srgbClr val="FFFFFF"/>
-                  </a:solidFill>
-                  <a:latin typeface="Arial"/>
-                  <a:ea typeface="Arial"/>
-                  <a:cs typeface="Arial"/>
-                  <a:sym typeface="Arial"/>
-                </a:rPr>
-                <a:t> Pilani</a:t>
-              </a:r>
-            </a:p>
-          </p:txBody>
-        </p:sp>
-        <p:sp>
-          <p:nvSpPr>
-            <p:cNvPr id="197" name="Shape 197"/>
-            <p:cNvSpPr txBox="1"/>
-            <p:nvPr/>
-          </p:nvSpPr>
-          <p:spPr>
-            <a:xfrm>
-              <a:off x="228600" y="2664767"/>
-              <a:ext cx="1904999" cy="230832"/>
-            </a:xfrm>
-            <a:prstGeom prst="rect">
-              <a:avLst/>
-            </a:prstGeom>
-            <a:noFill/>
-            <a:ln>
-              <a:noFill/>
-            </a:ln>
-          </p:spPr>
-          <p:txBody>
-            <a:bodyPr lIns="91425" tIns="45700" rIns="91425" bIns="45700" anchor="t" anchorCtr="0">
-              <a:noAutofit/>
-            </a:bodyPr>
-            <a:lstStyle/>
-            <a:p>
-              <a:pPr marL="0" marR="0" lvl="0" indent="0" algn="ctr" rtl="0">
-                <a:spcBef>
-                  <a:spcPts val="0"/>
-                </a:spcBef>
-                <a:spcAft>
-                  <a:spcPts val="0"/>
-                </a:spcAft>
-                <a:buSzPct val="25000"/>
-                <a:buNone/>
-              </a:pPr>
-              <a:r>
-                <a:rPr lang="en-US" sz="900" b="0" i="0" u="none" strike="noStrike" cap="none">
-                  <a:solidFill>
-                    <a:srgbClr val="FFFFFF"/>
-                  </a:solidFill>
-                  <a:latin typeface="Arial"/>
-                  <a:ea typeface="Arial"/>
-                  <a:cs typeface="Arial"/>
-                  <a:sym typeface="Arial"/>
-                </a:rPr>
-                <a:t>Pilani | Dubai | Goa | Hyderabad</a:t>
-              </a:r>
-            </a:p>
-          </p:txBody>
-        </p:sp>
-      </p:grpSp>
-      <p:sp>
-        <p:nvSpPr>
-          <p:cNvPr id="198" name="Shape 198"/>
-          <p:cNvSpPr txBox="1">
-            <a:spLocks noGrp="1"/>
-          </p:cNvSpPr>
-          <p:nvPr>
-            <p:ph type="ctrTitle"/>
-          </p:nvPr>
-        </p:nvSpPr>
-        <p:spPr>
-          <a:xfrm>
-            <a:off x="320728" y="5237530"/>
-            <a:ext cx="6199129" cy="1051102"/>
-          </a:xfrm>
-          <a:prstGeom prst="rect">
-            <a:avLst/>
-          </a:prstGeom>
-          <a:noFill/>
-          <a:ln>
-            <a:noFill/>
-          </a:ln>
-        </p:spPr>
-        <p:txBody>
-          <a:bodyPr lIns="91425" tIns="91425" rIns="91425" bIns="91425" anchor="b" anchorCtr="0"/>
-          <a:lstStyle>
-            <a:lvl1pPr marL="0" marR="0" lvl="0" indent="0" algn="l" rtl="0">
-              <a:spcBef>
-                <a:spcPts val="0"/>
-              </a:spcBef>
-              <a:spcAft>
-                <a:spcPts val="0"/>
-              </a:spcAft>
-              <a:defRPr/>
-            </a:lvl1pPr>
-            <a:lvl2pPr marL="0" marR="0" lvl="1" indent="0" algn="l" rtl="0">
-              <a:spcBef>
-                <a:spcPts val="0"/>
-              </a:spcBef>
-              <a:spcAft>
-                <a:spcPts val="0"/>
-              </a:spcAft>
-              <a:defRPr/>
-            </a:lvl2pPr>
-            <a:lvl3pPr marL="0" marR="0" lvl="2" indent="0" algn="l" rtl="0">
-              <a:spcBef>
-                <a:spcPts val="0"/>
-              </a:spcBef>
-              <a:spcAft>
-                <a:spcPts val="0"/>
-              </a:spcAft>
-              <a:defRPr/>
-            </a:lvl3pPr>
-            <a:lvl4pPr marL="0" marR="0" lvl="3" indent="0" algn="l" rtl="0">
-              <a:spcBef>
-                <a:spcPts val="0"/>
-              </a:spcBef>
-              <a:spcAft>
-                <a:spcPts val="0"/>
-              </a:spcAft>
-              <a:defRPr/>
-            </a:lvl4pPr>
-            <a:lvl5pPr marL="0" marR="0" lvl="4" indent="0" algn="l" rtl="0">
-              <a:spcBef>
-                <a:spcPts val="0"/>
-              </a:spcBef>
-              <a:spcAft>
-                <a:spcPts val="0"/>
-              </a:spcAft>
-              <a:defRPr/>
-            </a:lvl5pPr>
-            <a:lvl6pPr marL="465681" marR="0" lvl="5" indent="-8481" algn="l" rtl="0">
-              <a:spcBef>
-                <a:spcPts val="0"/>
-              </a:spcBef>
-              <a:spcAft>
-                <a:spcPts val="0"/>
-              </a:spcAft>
-              <a:defRPr/>
-            </a:lvl6pPr>
-            <a:lvl7pPr marL="931383" marR="0" lvl="6" indent="-4282" algn="l" rtl="0">
-              <a:spcBef>
-                <a:spcPts val="0"/>
-              </a:spcBef>
-              <a:spcAft>
-                <a:spcPts val="0"/>
-              </a:spcAft>
-              <a:defRPr/>
-            </a:lvl7pPr>
-            <a:lvl8pPr marL="1397075" marR="0" lvl="7" indent="-74" algn="l" rtl="0">
-              <a:spcBef>
-                <a:spcPts val="0"/>
-              </a:spcBef>
-              <a:spcAft>
-                <a:spcPts val="0"/>
-              </a:spcAft>
-              <a:defRPr/>
-            </a:lvl8pPr>
-            <a:lvl9pPr marL="1862760" marR="0" lvl="8" indent="-8560" algn="l" rtl="0">
-              <a:spcBef>
-                <a:spcPts val="0"/>
-              </a:spcBef>
-              <a:spcAft>
-                <a:spcPts val="0"/>
-              </a:spcAft>
-              <a:defRPr/>
-            </a:lvl9pPr>
-          </a:lstStyle>
-          <a:p>
-            <a:endParaRPr dirty="0"/>
-          </a:p>
-        </p:txBody>
-      </p:sp>
-      <p:grpSp>
-        <p:nvGrpSpPr>
-          <p:cNvPr id="13" name="Group 12"/>
-          <p:cNvGrpSpPr/>
-          <p:nvPr userDrawn="1"/>
-        </p:nvGrpSpPr>
-        <p:grpSpPr>
-          <a:xfrm>
-            <a:off x="1" y="6814184"/>
-            <a:ext cx="9144000" cy="72389"/>
-            <a:chOff x="1998227" y="6500996"/>
-            <a:chExt cx="7153215" cy="46648"/>
-          </a:xfrm>
-        </p:grpSpPr>
-        <p:sp>
-          <p:nvSpPr>
-            <p:cNvPr id="14" name="Shape 170"/>
-            <p:cNvSpPr/>
-            <p:nvPr/>
-          </p:nvSpPr>
-          <p:spPr>
-            <a:xfrm>
-              <a:off x="4408551" y="6500996"/>
-              <a:ext cx="2376028" cy="46648"/>
-            </a:xfrm>
-            <a:prstGeom prst="rect">
-              <a:avLst/>
-            </a:prstGeom>
-            <a:solidFill>
-              <a:srgbClr val="76C2E5"/>
-            </a:solidFill>
-            <a:ln>
-              <a:noFill/>
-            </a:ln>
-          </p:spPr>
-          <p:txBody>
-            <a:bodyPr lIns="93125" tIns="46550" rIns="93125" bIns="46550" anchor="ctr" anchorCtr="0">
-              <a:noAutofit/>
-            </a:bodyPr>
-            <a:lstStyle/>
-            <a:p>
-              <a:pPr marL="0" marR="0" lvl="0" indent="0" algn="ctr" rtl="0">
-                <a:spcBef>
-                  <a:spcPts val="0"/>
-                </a:spcBef>
-                <a:spcAft>
-                  <a:spcPts val="0"/>
-                </a:spcAft>
-                <a:buNone/>
-              </a:pPr>
-              <a:endParaRPr sz="1600" b="0" i="0" u="none" strike="noStrike" cap="none">
-                <a:solidFill>
-                  <a:srgbClr val="FFFFFF"/>
-                </a:solidFill>
-                <a:latin typeface="Arial"/>
-                <a:ea typeface="Arial"/>
-                <a:cs typeface="Arial"/>
-                <a:sym typeface="Arial"/>
-              </a:endParaRPr>
-            </a:p>
-          </p:txBody>
-        </p:sp>
-        <p:sp>
-          <p:nvSpPr>
-            <p:cNvPr id="15" name="Shape 171"/>
-            <p:cNvSpPr/>
-            <p:nvPr/>
-          </p:nvSpPr>
-          <p:spPr>
-            <a:xfrm>
-              <a:off x="1998227" y="6500996"/>
-              <a:ext cx="2410322" cy="46648"/>
-            </a:xfrm>
-            <a:prstGeom prst="rect">
-              <a:avLst/>
-            </a:prstGeom>
-            <a:solidFill>
-              <a:srgbClr val="FCB017"/>
-            </a:solidFill>
-            <a:ln>
-              <a:noFill/>
-            </a:ln>
-          </p:spPr>
-          <p:txBody>
-            <a:bodyPr lIns="93125" tIns="46550" rIns="93125" bIns="46550" anchor="ctr" anchorCtr="0">
-              <a:noAutofit/>
-            </a:bodyPr>
-            <a:lstStyle/>
-            <a:p>
-              <a:pPr marL="0" marR="0" lvl="0" indent="0" algn="ctr" rtl="0">
-                <a:spcBef>
-                  <a:spcPts val="0"/>
-                </a:spcBef>
-                <a:spcAft>
-                  <a:spcPts val="0"/>
-                </a:spcAft>
-                <a:buNone/>
-              </a:pPr>
-              <a:endParaRPr sz="1600" b="0" i="0" u="none" strike="noStrike" cap="none">
-                <a:solidFill>
-                  <a:srgbClr val="FFFFFF"/>
-                </a:solidFill>
-                <a:latin typeface="Arial"/>
-                <a:ea typeface="Arial"/>
-                <a:cs typeface="Arial"/>
-                <a:sym typeface="Arial"/>
-              </a:endParaRPr>
-            </a:p>
-          </p:txBody>
-        </p:sp>
-        <p:sp>
-          <p:nvSpPr>
-            <p:cNvPr id="16" name="Shape 172"/>
-            <p:cNvSpPr/>
-            <p:nvPr/>
-          </p:nvSpPr>
-          <p:spPr>
-            <a:xfrm>
-              <a:off x="6775414" y="6500996"/>
-              <a:ext cx="2376028" cy="46648"/>
-            </a:xfrm>
-            <a:prstGeom prst="rect">
-              <a:avLst/>
-            </a:prstGeom>
-            <a:solidFill>
-              <a:srgbClr val="FF0000"/>
-            </a:solidFill>
-            <a:ln>
-              <a:noFill/>
-            </a:ln>
-          </p:spPr>
-          <p:txBody>
-            <a:bodyPr lIns="93125" tIns="46550" rIns="93125" bIns="46550" anchor="ctr" anchorCtr="0">
-              <a:noAutofit/>
-            </a:bodyPr>
-            <a:lstStyle/>
-            <a:p>
-              <a:pPr marL="0" marR="0" lvl="0" indent="0" algn="ctr" rtl="0">
-                <a:spcBef>
-                  <a:spcPts val="0"/>
-                </a:spcBef>
-                <a:spcAft>
-                  <a:spcPts val="0"/>
-                </a:spcAft>
-                <a:buNone/>
-              </a:pPr>
-              <a:endParaRPr sz="1600" b="0" i="0" u="none" strike="noStrike" cap="none">
-                <a:solidFill>
-                  <a:srgbClr val="FFFFFF"/>
-                </a:solidFill>
-                <a:latin typeface="Arial"/>
-                <a:ea typeface="Arial"/>
-                <a:cs typeface="Arial"/>
-                <a:sym typeface="Arial"/>
-              </a:endParaRPr>
-            </a:p>
-          </p:txBody>
-        </p:sp>
-      </p:grpSp>
-      <p:sp>
-        <p:nvSpPr>
-          <p:cNvPr id="17" name="Shape 198"/>
-          <p:cNvSpPr txBox="1">
-            <a:spLocks/>
-          </p:cNvSpPr>
-          <p:nvPr userDrawn="1"/>
-        </p:nvSpPr>
-        <p:spPr>
-          <a:xfrm>
-            <a:off x="320728" y="4374693"/>
-            <a:ext cx="6199129" cy="858385"/>
-          </a:xfrm>
-          <a:prstGeom prst="rect">
-            <a:avLst/>
-          </a:prstGeom>
-          <a:noFill/>
-          <a:ln>
-            <a:noFill/>
-          </a:ln>
-        </p:spPr>
-        <p:txBody>
-          <a:bodyPr lIns="91425" tIns="91425" rIns="91425" bIns="91425" anchor="b" anchorCtr="0"/>
-          <a:lstStyle>
-            <a:defPPr marR="0" lvl="0" algn="l" rtl="0">
-              <a:lnSpc>
-                <a:spcPct val="100000"/>
-              </a:lnSpc>
-              <a:spcBef>
-                <a:spcPts val="0"/>
-              </a:spcBef>
-              <a:spcAft>
-                <a:spcPts val="0"/>
-              </a:spcAft>
-            </a:defPPr>
-            <a:lvl1pPr marL="0" marR="0" lvl="0" indent="0" algn="l" rtl="0">
-              <a:lnSpc>
-                <a:spcPct val="100000"/>
-              </a:lnSpc>
-              <a:spcBef>
-                <a:spcPts val="0"/>
-              </a:spcBef>
-              <a:spcAft>
-                <a:spcPts val="0"/>
-              </a:spcAft>
-              <a:buNone/>
-              <a:defRPr sz="1400" b="0" i="0" u="none" strike="noStrike" cap="none">
-                <a:solidFill>
-                  <a:srgbClr val="000000"/>
-                </a:solidFill>
-                <a:latin typeface="Arial"/>
-                <a:ea typeface="Arial"/>
-                <a:cs typeface="Arial"/>
-                <a:sym typeface="Arial"/>
-              </a:defRPr>
-            </a:lvl1pPr>
-            <a:lvl2pPr marL="0" marR="0" lvl="1" indent="0" algn="l" rtl="0">
-              <a:spcBef>
-                <a:spcPts val="0"/>
-              </a:spcBef>
-              <a:spcAft>
-                <a:spcPts val="0"/>
-              </a:spcAft>
-              <a:defRPr/>
-            </a:lvl2pPr>
-            <a:lvl3pPr marL="0" marR="0" lvl="2" indent="0" algn="l" rtl="0">
-              <a:spcBef>
-                <a:spcPts val="0"/>
-              </a:spcBef>
-              <a:spcAft>
-                <a:spcPts val="0"/>
-              </a:spcAft>
-              <a:defRPr/>
-            </a:lvl3pPr>
-            <a:lvl4pPr marL="0" marR="0" lvl="3" indent="0" algn="l" rtl="0">
-              <a:spcBef>
-                <a:spcPts val="0"/>
-              </a:spcBef>
-              <a:spcAft>
-                <a:spcPts val="0"/>
-              </a:spcAft>
-              <a:defRPr/>
-            </a:lvl4pPr>
-            <a:lvl5pPr marL="0" marR="0" lvl="4" indent="0" algn="l" rtl="0">
-              <a:spcBef>
-                <a:spcPts val="0"/>
-              </a:spcBef>
-              <a:spcAft>
-                <a:spcPts val="0"/>
-              </a:spcAft>
-              <a:defRPr/>
-            </a:lvl5pPr>
-            <a:lvl6pPr marL="465681" marR="0" lvl="5" indent="-8481" algn="l" rtl="0">
-              <a:spcBef>
-                <a:spcPts val="0"/>
-              </a:spcBef>
-              <a:spcAft>
-                <a:spcPts val="0"/>
-              </a:spcAft>
-              <a:defRPr/>
-            </a:lvl6pPr>
-            <a:lvl7pPr marL="931383" marR="0" lvl="6" indent="-4282" algn="l" rtl="0">
-              <a:spcBef>
-                <a:spcPts val="0"/>
-              </a:spcBef>
-              <a:spcAft>
-                <a:spcPts val="0"/>
-              </a:spcAft>
-              <a:defRPr/>
-            </a:lvl7pPr>
-            <a:lvl8pPr marL="1397075" marR="0" lvl="7" indent="-74" algn="l" rtl="0">
-              <a:spcBef>
-                <a:spcPts val="0"/>
-              </a:spcBef>
-              <a:spcAft>
-                <a:spcPts val="0"/>
-              </a:spcAft>
-              <a:defRPr/>
-            </a:lvl8pPr>
-            <a:lvl9pPr marL="1862760" marR="0" lvl="8" indent="-8560" algn="l" rtl="0">
-              <a:spcBef>
-                <a:spcPts val="0"/>
-              </a:spcBef>
-              <a:spcAft>
-                <a:spcPts val="0"/>
-              </a:spcAft>
-              <a:defRPr/>
-            </a:lvl9pPr>
-          </a:lstStyle>
-          <a:p>
-            <a:endParaRPr lang="en-IN" dirty="0"/>
-          </a:p>
-        </p:txBody>
-      </p:sp>
-    </p:spTree>
-  </p:cSld>
-  <p:clrMapOvr>
-    <a:masterClrMapping/>
-  </p:clrMapOvr>
-</p:sldLayout>
-</file>
-
-<file path=ppt/slideLayouts/slideLayout2.xml><?xml version="1.0" encoding="utf-8"?>
 <p:sldLayout xmlns:a="http://schemas.openxmlformats.org/drawingml/2006/main" xmlns:r="http://schemas.openxmlformats.org/officeDocument/2006/relationships" xmlns:p="http://schemas.openxmlformats.org/presentationml/2006/main" type="titleOnly">
   <p:cSld name="Title Only">
     <p:spTree>
@@ -1969,7 +1120,7 @@
 </p:sldLayout>
 </file>
 
-<file path=ppt/slideLayouts/slideLayout3.xml><?xml version="1.0" encoding="utf-8"?>
+<file path=ppt/slideLayouts/slideLayout2.xml><?xml version="1.0" encoding="utf-8"?>
 <p:sldLayout xmlns:a="http://schemas.openxmlformats.org/drawingml/2006/main" xmlns:r="http://schemas.openxmlformats.org/officeDocument/2006/relationships" xmlns:p="http://schemas.openxmlformats.org/presentationml/2006/main">
   <p:cSld name="Title Slide">
     <p:bg>
@@ -2604,7 +1755,7 @@
           <p:nvPr userDrawn="1"/>
         </p:nvPicPr>
         <p:blipFill rotWithShape="1">
-          <a:blip r:embed="rId5">
+          <a:blip r:embed="rId4">
             <a:alphaModFix/>
           </a:blip>
           <a:srcRect t="2" b="28592"/>
@@ -2690,9 +1841,8 @@
   </p:cSld>
   <p:clrMap bg1="lt1" tx1="dk1" bg2="dk2" tx2="lt2" accent1="accent1" accent2="accent2" accent3="accent3" accent4="accent4" accent5="accent5" accent6="accent6" hlink="hlink" folHlink="folHlink"/>
   <p:sldLayoutIdLst>
-    <p:sldLayoutId id="2147483663" r:id="rId1"/>
-    <p:sldLayoutId id="2147483661" r:id="rId2"/>
-    <p:sldLayoutId id="2147483669" r:id="rId3"/>
+    <p:sldLayoutId id="2147483661" r:id="rId1"/>
+    <p:sldLayoutId id="2147483669" r:id="rId2"/>
   </p:sldLayoutIdLst>
   <p:hf sldNum="0" hdr="0" ftr="0" dt="0"/>
   <p:txStyles>
@@ -3143,7 +2293,7 @@
   <p:cSld>
     <p:spTree>
       <p:nvGrpSpPr>
-        <p:cNvPr id="1" name="Shape 243"/>
+        <p:cNvPr id="1" name=""/>
         <p:cNvGrpSpPr/>
         <p:nvPr/>
       </p:nvGrpSpPr>
@@ -3157,80 +2307,499 @@
       </p:grpSpPr>
       <p:sp>
         <p:nvSpPr>
-          <p:cNvPr id="244" name="Shape 244"/>
-          <p:cNvSpPr txBox="1">
+          <p:cNvPr id="3" name="Title 2">
+            <a:extLst>
+              <a:ext uri="{FF2B5EF4-FFF2-40B4-BE49-F238E27FC236}">
+                <a16:creationId xmlns:a16="http://schemas.microsoft.com/office/drawing/2014/main" id="{E3EA8F3D-5E80-47FC-B604-B77B30D5F33E}"/>
+              </a:ext>
+            </a:extLst>
+          </p:cNvPr>
+          <p:cNvSpPr>
             <a:spLocks noGrp="1"/>
           </p:cNvSpPr>
           <p:nvPr>
-            <p:ph type="ctrTitle"/>
+            <p:ph type="title"/>
           </p:nvPr>
         </p:nvSpPr>
         <p:spPr>
           <a:xfrm>
-            <a:off x="273103" y="4570780"/>
-            <a:ext cx="7305708" cy="1434604"/>
-          </a:xfrm>
-          <a:prstGeom prst="rect">
-            <a:avLst/>
-          </a:prstGeom>
-          <a:noFill/>
-          <a:ln>
-            <a:noFill/>
-          </a:ln>
-        </p:spPr>
-        <p:txBody>
-          <a:bodyPr lIns="91400" tIns="45700" rIns="91400" bIns="45700" anchor="ctr" anchorCtr="0">
-            <a:noAutofit/>
-          </a:bodyPr>
-          <a:lstStyle/>
-          <a:p>
-            <a:pPr marL="0" marR="0" lvl="0" indent="0" rtl="0">
-              <a:lnSpc>
-                <a:spcPct val="111111"/>
-              </a:lnSpc>
-              <a:spcBef>
-                <a:spcPts val="0"/>
-              </a:spcBef>
-              <a:buClr>
-                <a:schemeClr val="lt1"/>
-              </a:buClr>
-              <a:buSzPct val="25000"/>
-              <a:buFont typeface="Arial"/>
-              <a:buNone/>
-            </a:pPr>
+            <a:off x="500446" y="400840"/>
+            <a:ext cx="6526336" cy="826598"/>
+          </a:xfrm>
+        </p:spPr>
+        <p:txBody>
+          <a:bodyPr/>
+          <a:lstStyle/>
+          <a:p>
             <a:r>
-              <a:rPr lang="en-US" sz="4400" i="0" u="none" strike="noStrike" cap="none" dirty="0">
-                <a:solidFill>
-                  <a:schemeClr val="tx1"/>
-                </a:solidFill>
-                <a:latin typeface="Calibri" panose="020F0502020204030204" pitchFamily="34" charset="0"/>
-                <a:cs typeface="Calibri" panose="020F0502020204030204" pitchFamily="34" charset="0"/>
-                <a:sym typeface="Arial"/>
-              </a:rPr>
-              <a:t>Wireless Sensor Network – </a:t>
-            </a:r>
-            <a:r>
-              <a:rPr lang="en-US" sz="4400" dirty="0">
-                <a:solidFill>
-                  <a:schemeClr val="tx1"/>
-                </a:solidFill>
+              <a:rPr lang="en-US" sz="4800" dirty="0">
                 <a:latin typeface="Calibri" panose="020F0502020204030204" pitchFamily="34" charset="0"/>
                 <a:cs typeface="Calibri" panose="020F0502020204030204" pitchFamily="34" charset="0"/>
               </a:rPr>
-              <a:t>Deployment Pattern</a:t>
+              <a:t>Deployment Patterns</a:t>
             </a:r>
-            <a:endParaRPr lang="en-US" sz="4400" i="0" u="none" strike="noStrike" cap="none" dirty="0">
-              <a:solidFill>
-                <a:schemeClr val="tx1"/>
-              </a:solidFill>
-              <a:latin typeface="Calibri" panose="020F0502020204030204" pitchFamily="34" charset="0"/>
-              <a:cs typeface="Calibri" panose="020F0502020204030204" pitchFamily="34" charset="0"/>
-              <a:sym typeface="Arial"/>
-            </a:endParaRPr>
+          </a:p>
+        </p:txBody>
+      </p:sp>
+      <p:sp>
+        <p:nvSpPr>
+          <p:cNvPr id="2" name="Oval 1">
+            <a:extLst>
+              <a:ext uri="{FF2B5EF4-FFF2-40B4-BE49-F238E27FC236}">
+                <a16:creationId xmlns:a16="http://schemas.microsoft.com/office/drawing/2014/main" id="{87DAE7D2-A10C-459D-8AFC-ED453DFC031A}"/>
+              </a:ext>
+            </a:extLst>
+          </p:cNvPr>
+          <p:cNvSpPr/>
+          <p:nvPr/>
+        </p:nvSpPr>
+        <p:spPr>
+          <a:xfrm>
+            <a:off x="1235676" y="2347784"/>
+            <a:ext cx="313038" cy="296562"/>
+          </a:xfrm>
+          <a:prstGeom prst="ellipse">
+            <a:avLst/>
+          </a:prstGeom>
+          <a:solidFill>
+            <a:schemeClr val="accent3"/>
+          </a:solidFill>
+          <a:ln>
+            <a:solidFill>
+              <a:schemeClr val="accent3">
+                <a:lumMod val="60000"/>
+                <a:lumOff val="40000"/>
+              </a:schemeClr>
+            </a:solidFill>
+          </a:ln>
+        </p:spPr>
+        <p:style>
+          <a:lnRef idx="2">
+            <a:schemeClr val="accent1">
+              <a:shade val="50000"/>
+            </a:schemeClr>
+          </a:lnRef>
+          <a:fillRef idx="1">
+            <a:schemeClr val="accent1"/>
+          </a:fillRef>
+          <a:effectRef idx="0">
+            <a:schemeClr val="accent1"/>
+          </a:effectRef>
+          <a:fontRef idx="minor">
+            <a:schemeClr val="lt1"/>
+          </a:fontRef>
+        </p:style>
+        <p:txBody>
+          <a:bodyPr rtlCol="0" anchor="ctr"/>
+          <a:lstStyle/>
+          <a:p>
+            <a:pPr algn="ctr"/>
+            <a:endParaRPr lang="en-US"/>
+          </a:p>
+        </p:txBody>
+      </p:sp>
+      <p:sp>
+        <p:nvSpPr>
+          <p:cNvPr id="5" name="Oval 4">
+            <a:extLst>
+              <a:ext uri="{FF2B5EF4-FFF2-40B4-BE49-F238E27FC236}">
+                <a16:creationId xmlns:a16="http://schemas.microsoft.com/office/drawing/2014/main" id="{1A359B55-24EE-4E3B-B067-9CFE5D5564E9}"/>
+              </a:ext>
+            </a:extLst>
+          </p:cNvPr>
+          <p:cNvSpPr/>
+          <p:nvPr/>
+        </p:nvSpPr>
+        <p:spPr>
+          <a:xfrm>
+            <a:off x="1672282" y="3805882"/>
+            <a:ext cx="313038" cy="296562"/>
+          </a:xfrm>
+          <a:prstGeom prst="ellipse">
+            <a:avLst/>
+          </a:prstGeom>
+          <a:solidFill>
+            <a:schemeClr val="accent3"/>
+          </a:solidFill>
+          <a:ln>
+            <a:solidFill>
+              <a:schemeClr val="accent3">
+                <a:lumMod val="60000"/>
+                <a:lumOff val="40000"/>
+              </a:schemeClr>
+            </a:solidFill>
+          </a:ln>
+        </p:spPr>
+        <p:style>
+          <a:lnRef idx="2">
+            <a:schemeClr val="accent1">
+              <a:shade val="50000"/>
+            </a:schemeClr>
+          </a:lnRef>
+          <a:fillRef idx="1">
+            <a:schemeClr val="accent1"/>
+          </a:fillRef>
+          <a:effectRef idx="0">
+            <a:schemeClr val="accent1"/>
+          </a:effectRef>
+          <a:fontRef idx="minor">
+            <a:schemeClr val="lt1"/>
+          </a:fontRef>
+        </p:style>
+        <p:txBody>
+          <a:bodyPr rtlCol="0" anchor="ctr"/>
+          <a:lstStyle/>
+          <a:p>
+            <a:pPr algn="ctr"/>
+            <a:endParaRPr lang="en-US"/>
+          </a:p>
+        </p:txBody>
+      </p:sp>
+      <p:sp>
+        <p:nvSpPr>
+          <p:cNvPr id="6" name="Oval 5">
+            <a:extLst>
+              <a:ext uri="{FF2B5EF4-FFF2-40B4-BE49-F238E27FC236}">
+                <a16:creationId xmlns:a16="http://schemas.microsoft.com/office/drawing/2014/main" id="{C9B3EA64-AE18-46F1-A2C2-32A45C56D4B7}"/>
+              </a:ext>
+            </a:extLst>
+          </p:cNvPr>
+          <p:cNvSpPr/>
+          <p:nvPr/>
+        </p:nvSpPr>
+        <p:spPr>
+          <a:xfrm>
+            <a:off x="2549612" y="2277762"/>
+            <a:ext cx="313038" cy="296562"/>
+          </a:xfrm>
+          <a:prstGeom prst="ellipse">
+            <a:avLst/>
+          </a:prstGeom>
+          <a:solidFill>
+            <a:schemeClr val="accent3"/>
+          </a:solidFill>
+          <a:ln>
+            <a:solidFill>
+              <a:schemeClr val="accent3">
+                <a:lumMod val="60000"/>
+                <a:lumOff val="40000"/>
+              </a:schemeClr>
+            </a:solidFill>
+          </a:ln>
+        </p:spPr>
+        <p:style>
+          <a:lnRef idx="2">
+            <a:schemeClr val="accent1">
+              <a:shade val="50000"/>
+            </a:schemeClr>
+          </a:lnRef>
+          <a:fillRef idx="1">
+            <a:schemeClr val="accent1"/>
+          </a:fillRef>
+          <a:effectRef idx="0">
+            <a:schemeClr val="accent1"/>
+          </a:effectRef>
+          <a:fontRef idx="minor">
+            <a:schemeClr val="lt1"/>
+          </a:fontRef>
+        </p:style>
+        <p:txBody>
+          <a:bodyPr rtlCol="0" anchor="ctr"/>
+          <a:lstStyle/>
+          <a:p>
+            <a:pPr algn="ctr"/>
+            <a:endParaRPr lang="en-US"/>
+          </a:p>
+        </p:txBody>
+      </p:sp>
+      <p:sp>
+        <p:nvSpPr>
+          <p:cNvPr id="7" name="Oval 6">
+            <a:extLst>
+              <a:ext uri="{FF2B5EF4-FFF2-40B4-BE49-F238E27FC236}">
+                <a16:creationId xmlns:a16="http://schemas.microsoft.com/office/drawing/2014/main" id="{72FBDB24-FA16-4E02-8A9C-ECFC90CE6B57}"/>
+              </a:ext>
+            </a:extLst>
+          </p:cNvPr>
+          <p:cNvSpPr/>
+          <p:nvPr/>
+        </p:nvSpPr>
+        <p:spPr>
+          <a:xfrm>
+            <a:off x="2796744" y="4460790"/>
+            <a:ext cx="313038" cy="296562"/>
+          </a:xfrm>
+          <a:prstGeom prst="ellipse">
+            <a:avLst/>
+          </a:prstGeom>
+          <a:solidFill>
+            <a:schemeClr val="accent3"/>
+          </a:solidFill>
+          <a:ln>
+            <a:solidFill>
+              <a:schemeClr val="accent3">
+                <a:lumMod val="60000"/>
+                <a:lumOff val="40000"/>
+              </a:schemeClr>
+            </a:solidFill>
+          </a:ln>
+        </p:spPr>
+        <p:style>
+          <a:lnRef idx="2">
+            <a:schemeClr val="accent1">
+              <a:shade val="50000"/>
+            </a:schemeClr>
+          </a:lnRef>
+          <a:fillRef idx="1">
+            <a:schemeClr val="accent1"/>
+          </a:fillRef>
+          <a:effectRef idx="0">
+            <a:schemeClr val="accent1"/>
+          </a:effectRef>
+          <a:fontRef idx="minor">
+            <a:schemeClr val="lt1"/>
+          </a:fontRef>
+        </p:style>
+        <p:txBody>
+          <a:bodyPr rtlCol="0" anchor="ctr"/>
+          <a:lstStyle/>
+          <a:p>
+            <a:pPr algn="ctr"/>
+            <a:endParaRPr lang="en-US"/>
+          </a:p>
+        </p:txBody>
+      </p:sp>
+      <p:sp>
+        <p:nvSpPr>
+          <p:cNvPr id="8" name="Oval 7">
+            <a:extLst>
+              <a:ext uri="{FF2B5EF4-FFF2-40B4-BE49-F238E27FC236}">
+                <a16:creationId xmlns:a16="http://schemas.microsoft.com/office/drawing/2014/main" id="{9677CED2-8202-4C3F-902F-52F46E35CF25}"/>
+              </a:ext>
+            </a:extLst>
+          </p:cNvPr>
+          <p:cNvSpPr/>
+          <p:nvPr/>
+        </p:nvSpPr>
+        <p:spPr>
+          <a:xfrm>
+            <a:off x="3089186" y="3113904"/>
+            <a:ext cx="313038" cy="296562"/>
+          </a:xfrm>
+          <a:prstGeom prst="ellipse">
+            <a:avLst/>
+          </a:prstGeom>
+          <a:solidFill>
+            <a:schemeClr val="accent3"/>
+          </a:solidFill>
+          <a:ln>
+            <a:solidFill>
+              <a:schemeClr val="accent3">
+                <a:lumMod val="60000"/>
+                <a:lumOff val="40000"/>
+              </a:schemeClr>
+            </a:solidFill>
+          </a:ln>
+        </p:spPr>
+        <p:style>
+          <a:lnRef idx="2">
+            <a:schemeClr val="accent1">
+              <a:shade val="50000"/>
+            </a:schemeClr>
+          </a:lnRef>
+          <a:fillRef idx="1">
+            <a:schemeClr val="accent1"/>
+          </a:fillRef>
+          <a:effectRef idx="0">
+            <a:schemeClr val="accent1"/>
+          </a:effectRef>
+          <a:fontRef idx="minor">
+            <a:schemeClr val="lt1"/>
+          </a:fontRef>
+        </p:style>
+        <p:txBody>
+          <a:bodyPr rtlCol="0" anchor="ctr"/>
+          <a:lstStyle/>
+          <a:p>
+            <a:pPr algn="ctr"/>
+            <a:endParaRPr lang="en-US"/>
+          </a:p>
+        </p:txBody>
+      </p:sp>
+      <p:sp>
+        <p:nvSpPr>
+          <p:cNvPr id="9" name="Oval 8">
+            <a:extLst>
+              <a:ext uri="{FF2B5EF4-FFF2-40B4-BE49-F238E27FC236}">
+                <a16:creationId xmlns:a16="http://schemas.microsoft.com/office/drawing/2014/main" id="{16793657-93CF-4754-9E10-C323570EDAED}"/>
+              </a:ext>
+            </a:extLst>
+          </p:cNvPr>
+          <p:cNvSpPr/>
+          <p:nvPr/>
+        </p:nvSpPr>
+        <p:spPr>
+          <a:xfrm>
+            <a:off x="4897391" y="3410466"/>
+            <a:ext cx="313038" cy="296562"/>
+          </a:xfrm>
+          <a:prstGeom prst="ellipse">
+            <a:avLst/>
+          </a:prstGeom>
+          <a:solidFill>
+            <a:schemeClr val="accent3"/>
+          </a:solidFill>
+          <a:ln>
+            <a:solidFill>
+              <a:schemeClr val="accent3">
+                <a:lumMod val="60000"/>
+                <a:lumOff val="40000"/>
+              </a:schemeClr>
+            </a:solidFill>
+          </a:ln>
+        </p:spPr>
+        <p:style>
+          <a:lnRef idx="2">
+            <a:schemeClr val="accent1">
+              <a:shade val="50000"/>
+            </a:schemeClr>
+          </a:lnRef>
+          <a:fillRef idx="1">
+            <a:schemeClr val="accent1"/>
+          </a:fillRef>
+          <a:effectRef idx="0">
+            <a:schemeClr val="accent1"/>
+          </a:effectRef>
+          <a:fontRef idx="minor">
+            <a:schemeClr val="lt1"/>
+          </a:fontRef>
+        </p:style>
+        <p:txBody>
+          <a:bodyPr rtlCol="0" anchor="ctr"/>
+          <a:lstStyle/>
+          <a:p>
+            <a:pPr algn="ctr"/>
+            <a:endParaRPr lang="en-US"/>
+          </a:p>
+        </p:txBody>
+      </p:sp>
+      <p:sp>
+        <p:nvSpPr>
+          <p:cNvPr id="10" name="Oval 9">
+            <a:extLst>
+              <a:ext uri="{FF2B5EF4-FFF2-40B4-BE49-F238E27FC236}">
+                <a16:creationId xmlns:a16="http://schemas.microsoft.com/office/drawing/2014/main" id="{C8F644F2-5801-43F5-A196-96EB64CDE77B}"/>
+              </a:ext>
+            </a:extLst>
+          </p:cNvPr>
+          <p:cNvSpPr/>
+          <p:nvPr/>
+        </p:nvSpPr>
+        <p:spPr>
+          <a:xfrm>
+            <a:off x="4155986" y="4308390"/>
+            <a:ext cx="313038" cy="296562"/>
+          </a:xfrm>
+          <a:prstGeom prst="ellipse">
+            <a:avLst/>
+          </a:prstGeom>
+          <a:solidFill>
+            <a:schemeClr val="accent3"/>
+          </a:solidFill>
+          <a:ln>
+            <a:solidFill>
+              <a:schemeClr val="accent3">
+                <a:lumMod val="60000"/>
+                <a:lumOff val="40000"/>
+              </a:schemeClr>
+            </a:solidFill>
+          </a:ln>
+        </p:spPr>
+        <p:style>
+          <a:lnRef idx="2">
+            <a:schemeClr val="accent1">
+              <a:shade val="50000"/>
+            </a:schemeClr>
+          </a:lnRef>
+          <a:fillRef idx="1">
+            <a:schemeClr val="accent1"/>
+          </a:fillRef>
+          <a:effectRef idx="0">
+            <a:schemeClr val="accent1"/>
+          </a:effectRef>
+          <a:fontRef idx="minor">
+            <a:schemeClr val="lt1"/>
+          </a:fontRef>
+        </p:style>
+        <p:txBody>
+          <a:bodyPr rtlCol="0" anchor="ctr"/>
+          <a:lstStyle/>
+          <a:p>
+            <a:pPr algn="ctr"/>
+            <a:endParaRPr lang="en-US"/>
+          </a:p>
+        </p:txBody>
+      </p:sp>
+      <p:sp>
+        <p:nvSpPr>
+          <p:cNvPr id="11" name="Oval 10">
+            <a:extLst>
+              <a:ext uri="{FF2B5EF4-FFF2-40B4-BE49-F238E27FC236}">
+                <a16:creationId xmlns:a16="http://schemas.microsoft.com/office/drawing/2014/main" id="{549B5A5E-C846-4C48-8807-CE1448AF1ABE}"/>
+              </a:ext>
+            </a:extLst>
+          </p:cNvPr>
+          <p:cNvSpPr/>
+          <p:nvPr/>
+        </p:nvSpPr>
+        <p:spPr>
+          <a:xfrm>
+            <a:off x="4155986" y="1981200"/>
+            <a:ext cx="313038" cy="296562"/>
+          </a:xfrm>
+          <a:prstGeom prst="ellipse">
+            <a:avLst/>
+          </a:prstGeom>
+          <a:solidFill>
+            <a:srgbClr val="00B050"/>
+          </a:solidFill>
+          <a:ln>
+            <a:solidFill>
+              <a:srgbClr val="00B050"/>
+            </a:solidFill>
+          </a:ln>
+        </p:spPr>
+        <p:style>
+          <a:lnRef idx="2">
+            <a:schemeClr val="accent1">
+              <a:shade val="50000"/>
+            </a:schemeClr>
+          </a:lnRef>
+          <a:fillRef idx="1">
+            <a:schemeClr val="accent1"/>
+          </a:fillRef>
+          <a:effectRef idx="0">
+            <a:schemeClr val="accent1"/>
+          </a:effectRef>
+          <a:fontRef idx="minor">
+            <a:schemeClr val="lt1"/>
+          </a:fontRef>
+        </p:style>
+        <p:txBody>
+          <a:bodyPr rtlCol="0" anchor="ctr"/>
+          <a:lstStyle/>
+          <a:p>
+            <a:pPr algn="ctr"/>
+            <a:endParaRPr lang="en-US"/>
           </a:p>
         </p:txBody>
       </p:sp>
     </p:spTree>
+    <p:extLst>
+      <p:ext uri="{BB962C8B-B14F-4D97-AF65-F5344CB8AC3E}">
+        <p14:creationId xmlns:p14="http://schemas.microsoft.com/office/powerpoint/2010/main" val="719883160"/>
+      </p:ext>
+    </p:extLst>
   </p:cSld>
   <p:clrMapOvr>
     <a:masterClrMapping/>
@@ -4100,7 +3669,7 @@
         </p:nvGrpSpPr>
         <p:grpSpPr>
           <a:xfrm>
-            <a:off x="2248931" y="3094760"/>
+            <a:off x="3181862" y="3030945"/>
             <a:ext cx="914400" cy="914400"/>
             <a:chOff x="734574" y="3266302"/>
             <a:chExt cx="914400" cy="914400"/>
@@ -4212,7 +3781,7 @@
         </p:blipFill>
         <p:spPr>
           <a:xfrm rot="10030935">
-            <a:off x="2292833" y="2483708"/>
+            <a:off x="3068016" y="2468926"/>
             <a:ext cx="914400" cy="914400"/>
           </a:xfrm>
           <a:prstGeom prst="rect">
@@ -4248,7 +3817,7 @@
         </p:blipFill>
         <p:spPr>
           <a:xfrm rot="20547500">
-            <a:off x="2394118" y="3812904"/>
+            <a:off x="3284002" y="3825233"/>
             <a:ext cx="914400" cy="914400"/>
           </a:xfrm>
           <a:prstGeom prst="rect">
@@ -4259,20 +3828,20 @@
     </p:spTree>
     <p:extLst>
       <p:ext uri="{BB962C8B-B14F-4D97-AF65-F5344CB8AC3E}">
-        <p14:creationId xmlns:p14="http://schemas.microsoft.com/office/powerpoint/2010/main" val="1333208345"/>
+        <p14:creationId xmlns:p14="http://schemas.microsoft.com/office/powerpoint/2010/main" val="138062225"/>
       </p:ext>
     </p:extLst>
   </p:cSld>
   <p:clrMapOvr>
     <a:masterClrMapping/>
   </p:clrMapOvr>
-  <mc:AlternateContent xmlns:mc="http://schemas.openxmlformats.org/markup-compatibility/2006">
-    <mc:Choice xmlns:p159="http://schemas.microsoft.com/office/powerpoint/2015/09/main" Requires="p159">
+  <mc:AlternateContent xmlns:mc="http://schemas.openxmlformats.org/markup-compatibility/2006" xmlns:p159="http://schemas.microsoft.com/office/powerpoint/2015/09/main">
+    <mc:Choice Requires="p159">
       <p:transition xmlns:p14="http://schemas.microsoft.com/office/powerpoint/2010/main" spd="slow" p14:dur="2000">
         <p159:morph option="byObject"/>
       </p:transition>
     </mc:Choice>
-    <mc:Fallback>
+    <mc:Fallback xmlns="">
       <p:transition spd="slow">
         <p:fade/>
       </p:transition>
@@ -5143,7 +4712,7 @@
         </p:nvGrpSpPr>
         <p:grpSpPr>
           <a:xfrm>
-            <a:off x="3181862" y="3030945"/>
+            <a:off x="4070707" y="3133766"/>
             <a:ext cx="914400" cy="914400"/>
             <a:chOff x="734574" y="3266302"/>
             <a:chExt cx="914400" cy="914400"/>
@@ -5255,7 +4824,7 @@
         </p:blipFill>
         <p:spPr>
           <a:xfrm rot="10030935">
-            <a:off x="3068016" y="2468926"/>
+            <a:off x="3902095" y="2467746"/>
             <a:ext cx="914400" cy="914400"/>
           </a:xfrm>
           <a:prstGeom prst="rect">
@@ -5291,7 +4860,7 @@
         </p:blipFill>
         <p:spPr>
           <a:xfrm rot="20547500">
-            <a:off x="3284002" y="3825233"/>
+            <a:off x="4363997" y="3861973"/>
             <a:ext cx="914400" cy="914400"/>
           </a:xfrm>
           <a:prstGeom prst="rect">
@@ -5302,20 +4871,20 @@
     </p:spTree>
     <p:extLst>
       <p:ext uri="{BB962C8B-B14F-4D97-AF65-F5344CB8AC3E}">
-        <p14:creationId xmlns:p14="http://schemas.microsoft.com/office/powerpoint/2010/main" val="138062225"/>
+        <p14:creationId xmlns:p14="http://schemas.microsoft.com/office/powerpoint/2010/main" val="1804368300"/>
       </p:ext>
     </p:extLst>
   </p:cSld>
   <p:clrMapOvr>
     <a:masterClrMapping/>
   </p:clrMapOvr>
-  <mc:AlternateContent xmlns:mc="http://schemas.openxmlformats.org/markup-compatibility/2006">
-    <mc:Choice xmlns:p159="http://schemas.microsoft.com/office/powerpoint/2015/09/main" Requires="p159">
+  <mc:AlternateContent xmlns:mc="http://schemas.openxmlformats.org/markup-compatibility/2006" xmlns:p159="http://schemas.microsoft.com/office/powerpoint/2015/09/main">
+    <mc:Choice Requires="p159">
       <p:transition xmlns:p14="http://schemas.microsoft.com/office/powerpoint/2010/main" spd="slow" p14:dur="2000">
         <p159:morph option="byObject"/>
       </p:transition>
     </mc:Choice>
-    <mc:Fallback>
+    <mc:Fallback xmlns="">
       <p:transition spd="slow">
         <p:fade/>
       </p:transition>
@@ -6186,7 +5755,7 @@
         </p:nvGrpSpPr>
         <p:grpSpPr>
           <a:xfrm>
-            <a:off x="4070707" y="3133766"/>
+            <a:off x="6691188" y="3030945"/>
             <a:ext cx="914400" cy="914400"/>
             <a:chOff x="734574" y="3266302"/>
             <a:chExt cx="914400" cy="914400"/>
@@ -6298,1049 +5867,6 @@
         </p:blipFill>
         <p:spPr>
           <a:xfrm rot="10030935">
-            <a:off x="3902095" y="2467746"/>
-            <a:ext cx="914400" cy="914400"/>
-          </a:xfrm>
-          <a:prstGeom prst="rect">
-            <a:avLst/>
-          </a:prstGeom>
-        </p:spPr>
-      </p:pic>
-      <p:pic>
-        <p:nvPicPr>
-          <p:cNvPr id="30" name="Graphic 29" descr="Wi-Fi">
-            <a:extLst>
-              <a:ext uri="{FF2B5EF4-FFF2-40B4-BE49-F238E27FC236}">
-                <a16:creationId xmlns:a16="http://schemas.microsoft.com/office/drawing/2014/main" id="{E7D315FF-92B0-4693-8FC1-D6C439B85ABF}"/>
-              </a:ext>
-            </a:extLst>
-          </p:cNvPr>
-          <p:cNvPicPr>
-            <a:picLocks noChangeAspect="1"/>
-          </p:cNvPicPr>
-          <p:nvPr/>
-        </p:nvPicPr>
-        <p:blipFill>
-          <a:blip r:embed="rId4">
-            <a:extLst>
-              <a:ext uri="{96DAC541-7B7A-43D3-8B79-37D633B846F1}">
-                <asvg:svgBlip xmlns:asvg="http://schemas.microsoft.com/office/drawing/2016/SVG/main" r:embed="rId5"/>
-              </a:ext>
-            </a:extLst>
-          </a:blip>
-          <a:stretch>
-            <a:fillRect/>
-          </a:stretch>
-        </p:blipFill>
-        <p:spPr>
-          <a:xfrm rot="20547500">
-            <a:off x="4363997" y="3861973"/>
-            <a:ext cx="914400" cy="914400"/>
-          </a:xfrm>
-          <a:prstGeom prst="rect">
-            <a:avLst/>
-          </a:prstGeom>
-        </p:spPr>
-      </p:pic>
-    </p:spTree>
-    <p:extLst>
-      <p:ext uri="{BB962C8B-B14F-4D97-AF65-F5344CB8AC3E}">
-        <p14:creationId xmlns:p14="http://schemas.microsoft.com/office/powerpoint/2010/main" val="1804368300"/>
-      </p:ext>
-    </p:extLst>
-  </p:cSld>
-  <p:clrMapOvr>
-    <a:masterClrMapping/>
-  </p:clrMapOvr>
-  <mc:AlternateContent xmlns:mc="http://schemas.openxmlformats.org/markup-compatibility/2006">
-    <mc:Choice xmlns:p159="http://schemas.microsoft.com/office/powerpoint/2015/09/main" Requires="p159">
-      <p:transition xmlns:p14="http://schemas.microsoft.com/office/powerpoint/2010/main" spd="slow" p14:dur="2000">
-        <p159:morph option="byObject"/>
-      </p:transition>
-    </mc:Choice>
-    <mc:Fallback>
-      <p:transition spd="slow">
-        <p:fade/>
-      </p:transition>
-    </mc:Fallback>
-  </mc:AlternateContent>
-</p:sld>
-</file>
-
-<file path=ppt/slides/slide13.xml><?xml version="1.0" encoding="utf-8"?>
-<p:sld xmlns:a="http://schemas.openxmlformats.org/drawingml/2006/main" xmlns:r="http://schemas.openxmlformats.org/officeDocument/2006/relationships" xmlns:p="http://schemas.openxmlformats.org/presentationml/2006/main">
-  <p:cSld>
-    <p:spTree>
-      <p:nvGrpSpPr>
-        <p:cNvPr id="1" name=""/>
-        <p:cNvGrpSpPr/>
-        <p:nvPr/>
-      </p:nvGrpSpPr>
-      <p:grpSpPr>
-        <a:xfrm>
-          <a:off x="0" y="0"/>
-          <a:ext cx="0" cy="0"/>
-          <a:chOff x="0" y="0"/>
-          <a:chExt cx="0" cy="0"/>
-        </a:xfrm>
-      </p:grpSpPr>
-      <p:sp>
-        <p:nvSpPr>
-          <p:cNvPr id="3" name="Title 2">
-            <a:extLst>
-              <a:ext uri="{FF2B5EF4-FFF2-40B4-BE49-F238E27FC236}">
-                <a16:creationId xmlns:a16="http://schemas.microsoft.com/office/drawing/2014/main" id="{E3EA8F3D-5E80-47FC-B604-B77B30D5F33E}"/>
-              </a:ext>
-            </a:extLst>
-          </p:cNvPr>
-          <p:cNvSpPr>
-            <a:spLocks noGrp="1"/>
-          </p:cNvSpPr>
-          <p:nvPr>
-            <p:ph type="title"/>
-          </p:nvPr>
-        </p:nvSpPr>
-        <p:spPr>
-          <a:xfrm>
-            <a:off x="579780" y="977488"/>
-            <a:ext cx="6526336" cy="826598"/>
-          </a:xfrm>
-        </p:spPr>
-        <p:txBody>
-          <a:bodyPr/>
-          <a:lstStyle/>
-          <a:p>
-            <a:r>
-              <a:rPr lang="en-US" sz="4800" dirty="0">
-                <a:latin typeface="Calibri" panose="020F0502020204030204" pitchFamily="34" charset="0"/>
-                <a:cs typeface="Calibri" panose="020F0502020204030204" pitchFamily="34" charset="0"/>
-              </a:rPr>
-              <a:t>Deployment Patterns – Data Mule</a:t>
-            </a:r>
-          </a:p>
-        </p:txBody>
-      </p:sp>
-      <p:sp>
-        <p:nvSpPr>
-          <p:cNvPr id="2" name="Oval 1">
-            <a:extLst>
-              <a:ext uri="{FF2B5EF4-FFF2-40B4-BE49-F238E27FC236}">
-                <a16:creationId xmlns:a16="http://schemas.microsoft.com/office/drawing/2014/main" id="{87DAE7D2-A10C-459D-8AFC-ED453DFC031A}"/>
-              </a:ext>
-            </a:extLst>
-          </p:cNvPr>
-          <p:cNvSpPr/>
-          <p:nvPr/>
-        </p:nvSpPr>
-        <p:spPr>
-          <a:xfrm>
-            <a:off x="1235676" y="2347784"/>
-            <a:ext cx="313038" cy="296562"/>
-          </a:xfrm>
-          <a:prstGeom prst="ellipse">
-            <a:avLst/>
-          </a:prstGeom>
-          <a:solidFill>
-            <a:schemeClr val="accent3"/>
-          </a:solidFill>
-          <a:ln>
-            <a:solidFill>
-              <a:schemeClr val="accent3">
-                <a:lumMod val="60000"/>
-                <a:lumOff val="40000"/>
-              </a:schemeClr>
-            </a:solidFill>
-          </a:ln>
-        </p:spPr>
-        <p:style>
-          <a:lnRef idx="2">
-            <a:schemeClr val="accent1">
-              <a:shade val="50000"/>
-            </a:schemeClr>
-          </a:lnRef>
-          <a:fillRef idx="1">
-            <a:schemeClr val="accent1"/>
-          </a:fillRef>
-          <a:effectRef idx="0">
-            <a:schemeClr val="accent1"/>
-          </a:effectRef>
-          <a:fontRef idx="minor">
-            <a:schemeClr val="lt1"/>
-          </a:fontRef>
-        </p:style>
-        <p:txBody>
-          <a:bodyPr rtlCol="0" anchor="ctr"/>
-          <a:lstStyle/>
-          <a:p>
-            <a:pPr algn="ctr"/>
-            <a:endParaRPr lang="en-US"/>
-          </a:p>
-        </p:txBody>
-      </p:sp>
-      <p:sp>
-        <p:nvSpPr>
-          <p:cNvPr id="5" name="Oval 4">
-            <a:extLst>
-              <a:ext uri="{FF2B5EF4-FFF2-40B4-BE49-F238E27FC236}">
-                <a16:creationId xmlns:a16="http://schemas.microsoft.com/office/drawing/2014/main" id="{1A359B55-24EE-4E3B-B067-9CFE5D5564E9}"/>
-              </a:ext>
-            </a:extLst>
-          </p:cNvPr>
-          <p:cNvSpPr/>
-          <p:nvPr/>
-        </p:nvSpPr>
-        <p:spPr>
-          <a:xfrm>
-            <a:off x="1392195" y="4786184"/>
-            <a:ext cx="313038" cy="296562"/>
-          </a:xfrm>
-          <a:prstGeom prst="ellipse">
-            <a:avLst/>
-          </a:prstGeom>
-          <a:solidFill>
-            <a:schemeClr val="accent3"/>
-          </a:solidFill>
-          <a:ln>
-            <a:solidFill>
-              <a:schemeClr val="accent3">
-                <a:lumMod val="60000"/>
-                <a:lumOff val="40000"/>
-              </a:schemeClr>
-            </a:solidFill>
-          </a:ln>
-        </p:spPr>
-        <p:style>
-          <a:lnRef idx="2">
-            <a:schemeClr val="accent1">
-              <a:shade val="50000"/>
-            </a:schemeClr>
-          </a:lnRef>
-          <a:fillRef idx="1">
-            <a:schemeClr val="accent1"/>
-          </a:fillRef>
-          <a:effectRef idx="0">
-            <a:schemeClr val="accent1"/>
-          </a:effectRef>
-          <a:fontRef idx="minor">
-            <a:schemeClr val="lt1"/>
-          </a:fontRef>
-        </p:style>
-        <p:txBody>
-          <a:bodyPr rtlCol="0" anchor="ctr"/>
-          <a:lstStyle/>
-          <a:p>
-            <a:pPr algn="ctr"/>
-            <a:endParaRPr lang="en-US"/>
-          </a:p>
-        </p:txBody>
-      </p:sp>
-      <p:sp>
-        <p:nvSpPr>
-          <p:cNvPr id="6" name="Oval 5">
-            <a:extLst>
-              <a:ext uri="{FF2B5EF4-FFF2-40B4-BE49-F238E27FC236}">
-                <a16:creationId xmlns:a16="http://schemas.microsoft.com/office/drawing/2014/main" id="{C9B3EA64-AE18-46F1-A2C2-32A45C56D4B7}"/>
-              </a:ext>
-            </a:extLst>
-          </p:cNvPr>
-          <p:cNvSpPr/>
-          <p:nvPr/>
-        </p:nvSpPr>
-        <p:spPr>
-          <a:xfrm>
-            <a:off x="2549612" y="2277762"/>
-            <a:ext cx="313038" cy="296562"/>
-          </a:xfrm>
-          <a:prstGeom prst="ellipse">
-            <a:avLst/>
-          </a:prstGeom>
-          <a:solidFill>
-            <a:schemeClr val="accent3"/>
-          </a:solidFill>
-          <a:ln>
-            <a:solidFill>
-              <a:schemeClr val="accent3">
-                <a:lumMod val="60000"/>
-                <a:lumOff val="40000"/>
-              </a:schemeClr>
-            </a:solidFill>
-          </a:ln>
-        </p:spPr>
-        <p:style>
-          <a:lnRef idx="2">
-            <a:schemeClr val="accent1">
-              <a:shade val="50000"/>
-            </a:schemeClr>
-          </a:lnRef>
-          <a:fillRef idx="1">
-            <a:schemeClr val="accent1"/>
-          </a:fillRef>
-          <a:effectRef idx="0">
-            <a:schemeClr val="accent1"/>
-          </a:effectRef>
-          <a:fontRef idx="minor">
-            <a:schemeClr val="lt1"/>
-          </a:fontRef>
-        </p:style>
-        <p:txBody>
-          <a:bodyPr rtlCol="0" anchor="ctr"/>
-          <a:lstStyle/>
-          <a:p>
-            <a:pPr algn="ctr"/>
-            <a:endParaRPr lang="en-US"/>
-          </a:p>
-        </p:txBody>
-      </p:sp>
-      <p:sp>
-        <p:nvSpPr>
-          <p:cNvPr id="7" name="Oval 6">
-            <a:extLst>
-              <a:ext uri="{FF2B5EF4-FFF2-40B4-BE49-F238E27FC236}">
-                <a16:creationId xmlns:a16="http://schemas.microsoft.com/office/drawing/2014/main" id="{72FBDB24-FA16-4E02-8A9C-ECFC90CE6B57}"/>
-              </a:ext>
-            </a:extLst>
-          </p:cNvPr>
-          <p:cNvSpPr/>
-          <p:nvPr/>
-        </p:nvSpPr>
-        <p:spPr>
-          <a:xfrm>
-            <a:off x="2722596" y="4695561"/>
-            <a:ext cx="313038" cy="296562"/>
-          </a:xfrm>
-          <a:prstGeom prst="ellipse">
-            <a:avLst/>
-          </a:prstGeom>
-          <a:solidFill>
-            <a:schemeClr val="accent3"/>
-          </a:solidFill>
-          <a:ln>
-            <a:solidFill>
-              <a:schemeClr val="accent3">
-                <a:lumMod val="60000"/>
-                <a:lumOff val="40000"/>
-              </a:schemeClr>
-            </a:solidFill>
-          </a:ln>
-        </p:spPr>
-        <p:style>
-          <a:lnRef idx="2">
-            <a:schemeClr val="accent1">
-              <a:shade val="50000"/>
-            </a:schemeClr>
-          </a:lnRef>
-          <a:fillRef idx="1">
-            <a:schemeClr val="accent1"/>
-          </a:fillRef>
-          <a:effectRef idx="0">
-            <a:schemeClr val="accent1"/>
-          </a:effectRef>
-          <a:fontRef idx="minor">
-            <a:schemeClr val="lt1"/>
-          </a:fontRef>
-        </p:style>
-        <p:txBody>
-          <a:bodyPr rtlCol="0" anchor="ctr"/>
-          <a:lstStyle/>
-          <a:p>
-            <a:pPr algn="ctr"/>
-            <a:endParaRPr lang="en-US"/>
-          </a:p>
-        </p:txBody>
-      </p:sp>
-      <p:sp>
-        <p:nvSpPr>
-          <p:cNvPr id="8" name="Oval 7">
-            <a:extLst>
-              <a:ext uri="{FF2B5EF4-FFF2-40B4-BE49-F238E27FC236}">
-                <a16:creationId xmlns:a16="http://schemas.microsoft.com/office/drawing/2014/main" id="{9677CED2-8202-4C3F-902F-52F46E35CF25}"/>
-              </a:ext>
-            </a:extLst>
-          </p:cNvPr>
-          <p:cNvSpPr/>
-          <p:nvPr/>
-        </p:nvSpPr>
-        <p:spPr>
-          <a:xfrm>
-            <a:off x="4102437" y="2199503"/>
-            <a:ext cx="313038" cy="296562"/>
-          </a:xfrm>
-          <a:prstGeom prst="ellipse">
-            <a:avLst/>
-          </a:prstGeom>
-          <a:solidFill>
-            <a:schemeClr val="accent3"/>
-          </a:solidFill>
-          <a:ln>
-            <a:solidFill>
-              <a:schemeClr val="accent3">
-                <a:lumMod val="60000"/>
-                <a:lumOff val="40000"/>
-              </a:schemeClr>
-            </a:solidFill>
-          </a:ln>
-        </p:spPr>
-        <p:style>
-          <a:lnRef idx="2">
-            <a:schemeClr val="accent1">
-              <a:shade val="50000"/>
-            </a:schemeClr>
-          </a:lnRef>
-          <a:fillRef idx="1">
-            <a:schemeClr val="accent1"/>
-          </a:fillRef>
-          <a:effectRef idx="0">
-            <a:schemeClr val="accent1"/>
-          </a:effectRef>
-          <a:fontRef idx="minor">
-            <a:schemeClr val="lt1"/>
-          </a:fontRef>
-        </p:style>
-        <p:txBody>
-          <a:bodyPr rtlCol="0" anchor="ctr"/>
-          <a:lstStyle/>
-          <a:p>
-            <a:pPr algn="ctr"/>
-            <a:endParaRPr lang="en-US"/>
-          </a:p>
-        </p:txBody>
-      </p:sp>
-      <p:sp>
-        <p:nvSpPr>
-          <p:cNvPr id="9" name="Oval 8">
-            <a:extLst>
-              <a:ext uri="{FF2B5EF4-FFF2-40B4-BE49-F238E27FC236}">
-                <a16:creationId xmlns:a16="http://schemas.microsoft.com/office/drawing/2014/main" id="{16793657-93CF-4754-9E10-C323570EDAED}"/>
-              </a:ext>
-            </a:extLst>
-          </p:cNvPr>
-          <p:cNvSpPr/>
-          <p:nvPr/>
-        </p:nvSpPr>
-        <p:spPr>
-          <a:xfrm>
-            <a:off x="3643178" y="4670841"/>
-            <a:ext cx="313038" cy="296562"/>
-          </a:xfrm>
-          <a:prstGeom prst="ellipse">
-            <a:avLst/>
-          </a:prstGeom>
-          <a:solidFill>
-            <a:schemeClr val="accent3"/>
-          </a:solidFill>
-          <a:ln>
-            <a:solidFill>
-              <a:schemeClr val="accent3">
-                <a:lumMod val="60000"/>
-                <a:lumOff val="40000"/>
-              </a:schemeClr>
-            </a:solidFill>
-          </a:ln>
-        </p:spPr>
-        <p:style>
-          <a:lnRef idx="2">
-            <a:schemeClr val="accent1">
-              <a:shade val="50000"/>
-            </a:schemeClr>
-          </a:lnRef>
-          <a:fillRef idx="1">
-            <a:schemeClr val="accent1"/>
-          </a:fillRef>
-          <a:effectRef idx="0">
-            <a:schemeClr val="accent1"/>
-          </a:effectRef>
-          <a:fontRef idx="minor">
-            <a:schemeClr val="lt1"/>
-          </a:fontRef>
-        </p:style>
-        <p:txBody>
-          <a:bodyPr rtlCol="0" anchor="ctr"/>
-          <a:lstStyle/>
-          <a:p>
-            <a:pPr algn="ctr"/>
-            <a:endParaRPr lang="en-US"/>
-          </a:p>
-        </p:txBody>
-      </p:sp>
-      <p:sp>
-        <p:nvSpPr>
-          <p:cNvPr id="10" name="Oval 9">
-            <a:extLst>
-              <a:ext uri="{FF2B5EF4-FFF2-40B4-BE49-F238E27FC236}">
-                <a16:creationId xmlns:a16="http://schemas.microsoft.com/office/drawing/2014/main" id="{C8F644F2-5801-43F5-A196-96EB64CDE77B}"/>
-              </a:ext>
-            </a:extLst>
-          </p:cNvPr>
-          <p:cNvSpPr/>
-          <p:nvPr/>
-        </p:nvSpPr>
-        <p:spPr>
-          <a:xfrm>
-            <a:off x="4740872" y="4670841"/>
-            <a:ext cx="313038" cy="296562"/>
-          </a:xfrm>
-          <a:prstGeom prst="ellipse">
-            <a:avLst/>
-          </a:prstGeom>
-          <a:solidFill>
-            <a:schemeClr val="accent3"/>
-          </a:solidFill>
-          <a:ln>
-            <a:solidFill>
-              <a:schemeClr val="accent3">
-                <a:lumMod val="60000"/>
-                <a:lumOff val="40000"/>
-              </a:schemeClr>
-            </a:solidFill>
-          </a:ln>
-        </p:spPr>
-        <p:style>
-          <a:lnRef idx="2">
-            <a:schemeClr val="accent1">
-              <a:shade val="50000"/>
-            </a:schemeClr>
-          </a:lnRef>
-          <a:fillRef idx="1">
-            <a:schemeClr val="accent1"/>
-          </a:fillRef>
-          <a:effectRef idx="0">
-            <a:schemeClr val="accent1"/>
-          </a:effectRef>
-          <a:fontRef idx="minor">
-            <a:schemeClr val="lt1"/>
-          </a:fontRef>
-        </p:style>
-        <p:txBody>
-          <a:bodyPr rtlCol="0" anchor="ctr"/>
-          <a:lstStyle/>
-          <a:p>
-            <a:pPr algn="ctr"/>
-            <a:endParaRPr lang="en-US"/>
-          </a:p>
-        </p:txBody>
-      </p:sp>
-      <p:sp>
-        <p:nvSpPr>
-          <p:cNvPr id="11" name="Oval 10">
-            <a:extLst>
-              <a:ext uri="{FF2B5EF4-FFF2-40B4-BE49-F238E27FC236}">
-                <a16:creationId xmlns:a16="http://schemas.microsoft.com/office/drawing/2014/main" id="{549B5A5E-C846-4C48-8807-CE1448AF1ABE}"/>
-              </a:ext>
-            </a:extLst>
-          </p:cNvPr>
-          <p:cNvSpPr/>
-          <p:nvPr/>
-        </p:nvSpPr>
-        <p:spPr>
-          <a:xfrm>
-            <a:off x="8114249" y="2644346"/>
-            <a:ext cx="313038" cy="296562"/>
-          </a:xfrm>
-          <a:prstGeom prst="ellipse">
-            <a:avLst/>
-          </a:prstGeom>
-          <a:solidFill>
-            <a:srgbClr val="00B050"/>
-          </a:solidFill>
-          <a:ln>
-            <a:solidFill>
-              <a:srgbClr val="00B050"/>
-            </a:solidFill>
-          </a:ln>
-        </p:spPr>
-        <p:style>
-          <a:lnRef idx="2">
-            <a:schemeClr val="accent1">
-              <a:shade val="50000"/>
-            </a:schemeClr>
-          </a:lnRef>
-          <a:fillRef idx="1">
-            <a:schemeClr val="accent1"/>
-          </a:fillRef>
-          <a:effectRef idx="0">
-            <a:schemeClr val="accent1"/>
-          </a:effectRef>
-          <a:fontRef idx="minor">
-            <a:schemeClr val="lt1"/>
-          </a:fontRef>
-        </p:style>
-        <p:txBody>
-          <a:bodyPr rtlCol="0" anchor="ctr"/>
-          <a:lstStyle/>
-          <a:p>
-            <a:pPr algn="ctr"/>
-            <a:endParaRPr lang="en-US"/>
-          </a:p>
-        </p:txBody>
-      </p:sp>
-      <p:sp>
-        <p:nvSpPr>
-          <p:cNvPr id="12" name="Oval 11">
-            <a:extLst>
-              <a:ext uri="{FF2B5EF4-FFF2-40B4-BE49-F238E27FC236}">
-                <a16:creationId xmlns:a16="http://schemas.microsoft.com/office/drawing/2014/main" id="{9F67D8B5-67E7-4553-BC03-32CC50BA14DA}"/>
-              </a:ext>
-            </a:extLst>
-          </p:cNvPr>
-          <p:cNvSpPr/>
-          <p:nvPr/>
-        </p:nvSpPr>
-        <p:spPr>
-          <a:xfrm>
-            <a:off x="5539934" y="4765583"/>
-            <a:ext cx="313038" cy="296562"/>
-          </a:xfrm>
-          <a:prstGeom prst="ellipse">
-            <a:avLst/>
-          </a:prstGeom>
-          <a:solidFill>
-            <a:schemeClr val="accent3"/>
-          </a:solidFill>
-          <a:ln>
-            <a:solidFill>
-              <a:schemeClr val="accent3">
-                <a:lumMod val="60000"/>
-                <a:lumOff val="40000"/>
-              </a:schemeClr>
-            </a:solidFill>
-          </a:ln>
-        </p:spPr>
-        <p:style>
-          <a:lnRef idx="2">
-            <a:schemeClr val="accent1">
-              <a:shade val="50000"/>
-            </a:schemeClr>
-          </a:lnRef>
-          <a:fillRef idx="1">
-            <a:schemeClr val="accent1"/>
-          </a:fillRef>
-          <a:effectRef idx="0">
-            <a:schemeClr val="accent1"/>
-          </a:effectRef>
-          <a:fontRef idx="minor">
-            <a:schemeClr val="lt1"/>
-          </a:fontRef>
-        </p:style>
-        <p:txBody>
-          <a:bodyPr rtlCol="0" anchor="ctr"/>
-          <a:lstStyle/>
-          <a:p>
-            <a:pPr algn="ctr"/>
-            <a:endParaRPr lang="en-US"/>
-          </a:p>
-        </p:txBody>
-      </p:sp>
-      <p:sp>
-        <p:nvSpPr>
-          <p:cNvPr id="13" name="Oval 12">
-            <a:extLst>
-              <a:ext uri="{FF2B5EF4-FFF2-40B4-BE49-F238E27FC236}">
-                <a16:creationId xmlns:a16="http://schemas.microsoft.com/office/drawing/2014/main" id="{9E0032CD-559B-471F-8187-504D07A41426}"/>
-              </a:ext>
-            </a:extLst>
-          </p:cNvPr>
-          <p:cNvSpPr/>
-          <p:nvPr/>
-        </p:nvSpPr>
-        <p:spPr>
-          <a:xfrm>
-            <a:off x="3326024" y="2209797"/>
-            <a:ext cx="313038" cy="296562"/>
-          </a:xfrm>
-          <a:prstGeom prst="ellipse">
-            <a:avLst/>
-          </a:prstGeom>
-          <a:solidFill>
-            <a:schemeClr val="accent3"/>
-          </a:solidFill>
-          <a:ln>
-            <a:solidFill>
-              <a:schemeClr val="accent3">
-                <a:lumMod val="60000"/>
-                <a:lumOff val="40000"/>
-              </a:schemeClr>
-            </a:solidFill>
-          </a:ln>
-        </p:spPr>
-        <p:style>
-          <a:lnRef idx="2">
-            <a:schemeClr val="accent1">
-              <a:shade val="50000"/>
-            </a:schemeClr>
-          </a:lnRef>
-          <a:fillRef idx="1">
-            <a:schemeClr val="accent1"/>
-          </a:fillRef>
-          <a:effectRef idx="0">
-            <a:schemeClr val="accent1"/>
-          </a:effectRef>
-          <a:fontRef idx="minor">
-            <a:schemeClr val="lt1"/>
-          </a:fontRef>
-        </p:style>
-        <p:txBody>
-          <a:bodyPr rtlCol="0" anchor="ctr"/>
-          <a:lstStyle/>
-          <a:p>
-            <a:pPr algn="ctr"/>
-            <a:endParaRPr lang="en-US"/>
-          </a:p>
-        </p:txBody>
-      </p:sp>
-      <p:sp>
-        <p:nvSpPr>
-          <p:cNvPr id="14" name="Oval 13">
-            <a:extLst>
-              <a:ext uri="{FF2B5EF4-FFF2-40B4-BE49-F238E27FC236}">
-                <a16:creationId xmlns:a16="http://schemas.microsoft.com/office/drawing/2014/main" id="{4A68F011-5B5A-4B08-8742-D35667696780}"/>
-              </a:ext>
-            </a:extLst>
-          </p:cNvPr>
-          <p:cNvSpPr/>
-          <p:nvPr/>
-        </p:nvSpPr>
-        <p:spPr>
-          <a:xfrm>
-            <a:off x="6853870" y="4695561"/>
-            <a:ext cx="313038" cy="296562"/>
-          </a:xfrm>
-          <a:prstGeom prst="ellipse">
-            <a:avLst/>
-          </a:prstGeom>
-          <a:solidFill>
-            <a:schemeClr val="accent3"/>
-          </a:solidFill>
-          <a:ln>
-            <a:solidFill>
-              <a:schemeClr val="accent3">
-                <a:lumMod val="60000"/>
-                <a:lumOff val="40000"/>
-              </a:schemeClr>
-            </a:solidFill>
-          </a:ln>
-        </p:spPr>
-        <p:style>
-          <a:lnRef idx="2">
-            <a:schemeClr val="accent1">
-              <a:shade val="50000"/>
-            </a:schemeClr>
-          </a:lnRef>
-          <a:fillRef idx="1">
-            <a:schemeClr val="accent1"/>
-          </a:fillRef>
-          <a:effectRef idx="0">
-            <a:schemeClr val="accent1"/>
-          </a:effectRef>
-          <a:fontRef idx="minor">
-            <a:schemeClr val="lt1"/>
-          </a:fontRef>
-        </p:style>
-        <p:txBody>
-          <a:bodyPr rtlCol="0" anchor="ctr"/>
-          <a:lstStyle/>
-          <a:p>
-            <a:pPr algn="ctr"/>
-            <a:endParaRPr lang="en-US"/>
-          </a:p>
-        </p:txBody>
-      </p:sp>
-      <p:sp>
-        <p:nvSpPr>
-          <p:cNvPr id="15" name="Oval 14">
-            <a:extLst>
-              <a:ext uri="{FF2B5EF4-FFF2-40B4-BE49-F238E27FC236}">
-                <a16:creationId xmlns:a16="http://schemas.microsoft.com/office/drawing/2014/main" id="{13C2139E-F2A3-4AB2-903F-C669EE3629D1}"/>
-              </a:ext>
-            </a:extLst>
-          </p:cNvPr>
-          <p:cNvSpPr/>
-          <p:nvPr/>
-        </p:nvSpPr>
-        <p:spPr>
-          <a:xfrm>
-            <a:off x="5539934" y="2199503"/>
-            <a:ext cx="313038" cy="296562"/>
-          </a:xfrm>
-          <a:prstGeom prst="ellipse">
-            <a:avLst/>
-          </a:prstGeom>
-          <a:solidFill>
-            <a:schemeClr val="accent3"/>
-          </a:solidFill>
-          <a:ln>
-            <a:solidFill>
-              <a:schemeClr val="accent3">
-                <a:lumMod val="60000"/>
-                <a:lumOff val="40000"/>
-              </a:schemeClr>
-            </a:solidFill>
-          </a:ln>
-        </p:spPr>
-        <p:style>
-          <a:lnRef idx="2">
-            <a:schemeClr val="accent1">
-              <a:shade val="50000"/>
-            </a:schemeClr>
-          </a:lnRef>
-          <a:fillRef idx="1">
-            <a:schemeClr val="accent1"/>
-          </a:fillRef>
-          <a:effectRef idx="0">
-            <a:schemeClr val="accent1"/>
-          </a:effectRef>
-          <a:fontRef idx="minor">
-            <a:schemeClr val="lt1"/>
-          </a:fontRef>
-        </p:style>
-        <p:txBody>
-          <a:bodyPr rtlCol="0" anchor="ctr"/>
-          <a:lstStyle/>
-          <a:p>
-            <a:pPr algn="ctr"/>
-            <a:endParaRPr lang="en-US"/>
-          </a:p>
-        </p:txBody>
-      </p:sp>
-      <p:sp>
-        <p:nvSpPr>
-          <p:cNvPr id="16" name="Oval 15">
-            <a:extLst>
-              <a:ext uri="{FF2B5EF4-FFF2-40B4-BE49-F238E27FC236}">
-                <a16:creationId xmlns:a16="http://schemas.microsoft.com/office/drawing/2014/main" id="{EDC1A8E6-A577-491C-82C2-6BB854376584}"/>
-              </a:ext>
-            </a:extLst>
-          </p:cNvPr>
-          <p:cNvSpPr/>
-          <p:nvPr/>
-        </p:nvSpPr>
-        <p:spPr>
-          <a:xfrm>
-            <a:off x="6730288" y="2061516"/>
-            <a:ext cx="313038" cy="296562"/>
-          </a:xfrm>
-          <a:prstGeom prst="ellipse">
-            <a:avLst/>
-          </a:prstGeom>
-          <a:solidFill>
-            <a:schemeClr val="accent3"/>
-          </a:solidFill>
-          <a:ln>
-            <a:solidFill>
-              <a:schemeClr val="accent3">
-                <a:lumMod val="60000"/>
-                <a:lumOff val="40000"/>
-              </a:schemeClr>
-            </a:solidFill>
-          </a:ln>
-        </p:spPr>
-        <p:style>
-          <a:lnRef idx="2">
-            <a:schemeClr val="accent1">
-              <a:shade val="50000"/>
-            </a:schemeClr>
-          </a:lnRef>
-          <a:fillRef idx="1">
-            <a:schemeClr val="accent1"/>
-          </a:fillRef>
-          <a:effectRef idx="0">
-            <a:schemeClr val="accent1"/>
-          </a:effectRef>
-          <a:fontRef idx="minor">
-            <a:schemeClr val="lt1"/>
-          </a:fontRef>
-        </p:style>
-        <p:txBody>
-          <a:bodyPr rtlCol="0" anchor="ctr"/>
-          <a:lstStyle/>
-          <a:p>
-            <a:pPr algn="ctr"/>
-            <a:endParaRPr lang="en-US"/>
-          </a:p>
-        </p:txBody>
-      </p:sp>
-      <p:sp>
-        <p:nvSpPr>
-          <p:cNvPr id="18" name="Oval 17">
-            <a:extLst>
-              <a:ext uri="{FF2B5EF4-FFF2-40B4-BE49-F238E27FC236}">
-                <a16:creationId xmlns:a16="http://schemas.microsoft.com/office/drawing/2014/main" id="{4ED0E9BA-8A8B-40E3-9217-DED60B69C4E0}"/>
-              </a:ext>
-            </a:extLst>
-          </p:cNvPr>
-          <p:cNvSpPr/>
-          <p:nvPr/>
-        </p:nvSpPr>
-        <p:spPr>
-          <a:xfrm>
-            <a:off x="7613805" y="4098304"/>
-            <a:ext cx="313038" cy="296562"/>
-          </a:xfrm>
-          <a:prstGeom prst="ellipse">
-            <a:avLst/>
-          </a:prstGeom>
-          <a:solidFill>
-            <a:schemeClr val="accent3"/>
-          </a:solidFill>
-          <a:ln>
-            <a:solidFill>
-              <a:schemeClr val="accent3">
-                <a:lumMod val="60000"/>
-                <a:lumOff val="40000"/>
-              </a:schemeClr>
-            </a:solidFill>
-          </a:ln>
-        </p:spPr>
-        <p:style>
-          <a:lnRef idx="2">
-            <a:schemeClr val="accent1">
-              <a:shade val="50000"/>
-            </a:schemeClr>
-          </a:lnRef>
-          <a:fillRef idx="1">
-            <a:schemeClr val="accent1"/>
-          </a:fillRef>
-          <a:effectRef idx="0">
-            <a:schemeClr val="accent1"/>
-          </a:effectRef>
-          <a:fontRef idx="minor">
-            <a:schemeClr val="lt1"/>
-          </a:fontRef>
-        </p:style>
-        <p:txBody>
-          <a:bodyPr rtlCol="0" anchor="ctr"/>
-          <a:lstStyle/>
-          <a:p>
-            <a:pPr algn="ctr"/>
-            <a:endParaRPr lang="en-US"/>
-          </a:p>
-        </p:txBody>
-      </p:sp>
-      <p:grpSp>
-        <p:nvGrpSpPr>
-          <p:cNvPr id="27" name="Group 26">
-            <a:extLst>
-              <a:ext uri="{FF2B5EF4-FFF2-40B4-BE49-F238E27FC236}">
-                <a16:creationId xmlns:a16="http://schemas.microsoft.com/office/drawing/2014/main" id="{35FEEF94-4512-4C7A-8AB7-3F4C9AB95BFC}"/>
-              </a:ext>
-            </a:extLst>
-          </p:cNvPr>
-          <p:cNvGrpSpPr/>
-          <p:nvPr/>
-        </p:nvGrpSpPr>
-        <p:grpSpPr>
-          <a:xfrm>
-            <a:off x="6691188" y="3030945"/>
-            <a:ext cx="914400" cy="914400"/>
-            <a:chOff x="734574" y="3266302"/>
-            <a:chExt cx="914400" cy="914400"/>
-          </a:xfrm>
-        </p:grpSpPr>
-        <p:pic>
-          <p:nvPicPr>
-            <p:cNvPr id="21" name="Graphic 20" descr="Dog">
-              <a:extLst>
-                <a:ext uri="{FF2B5EF4-FFF2-40B4-BE49-F238E27FC236}">
-                  <a16:creationId xmlns:a16="http://schemas.microsoft.com/office/drawing/2014/main" id="{B11D3EE9-1A6C-4CFF-BB34-7FF8B6C5E3F8}"/>
-                </a:ext>
-              </a:extLst>
-            </p:cNvPr>
-            <p:cNvPicPr>
-              <a:picLocks noChangeAspect="1"/>
-            </p:cNvPicPr>
-            <p:nvPr/>
-          </p:nvPicPr>
-          <p:blipFill>
-            <a:blip r:embed="rId2">
-              <a:extLst>
-                <a:ext uri="{96DAC541-7B7A-43D3-8B79-37D633B846F1}">
-                  <asvg:svgBlip xmlns:asvg="http://schemas.microsoft.com/office/drawing/2016/SVG/main" r:embed="rId3"/>
-                </a:ext>
-              </a:extLst>
-            </a:blip>
-            <a:stretch>
-              <a:fillRect/>
-            </a:stretch>
-          </p:blipFill>
-          <p:spPr>
-            <a:xfrm rot="20965205">
-              <a:off x="734574" y="3266302"/>
-              <a:ext cx="914400" cy="914400"/>
-            </a:xfrm>
-            <a:prstGeom prst="rect">
-              <a:avLst/>
-            </a:prstGeom>
-          </p:spPr>
-        </p:pic>
-        <p:cxnSp>
-          <p:nvCxnSpPr>
-            <p:cNvPr id="25" name="Straight Connector 24">
-              <a:extLst>
-                <a:ext uri="{FF2B5EF4-FFF2-40B4-BE49-F238E27FC236}">
-                  <a16:creationId xmlns:a16="http://schemas.microsoft.com/office/drawing/2014/main" id="{8E6AA542-66D9-4EC9-8192-4787BC968C91}"/>
-                </a:ext>
-              </a:extLst>
-            </p:cNvPr>
-            <p:cNvCxnSpPr/>
-            <p:nvPr/>
-          </p:nvCxnSpPr>
-          <p:spPr>
-            <a:xfrm>
-              <a:off x="1235676" y="3534032"/>
-              <a:ext cx="156519" cy="98854"/>
-            </a:xfrm>
-            <a:prstGeom prst="line">
-              <a:avLst/>
-            </a:prstGeom>
-            <a:ln w="38100">
-              <a:solidFill>
-                <a:schemeClr val="tx2"/>
-              </a:solidFill>
-            </a:ln>
-          </p:spPr>
-          <p:style>
-            <a:lnRef idx="1">
-              <a:schemeClr val="accent1"/>
-            </a:lnRef>
-            <a:fillRef idx="0">
-              <a:schemeClr val="accent1"/>
-            </a:fillRef>
-            <a:effectRef idx="0">
-              <a:schemeClr val="accent1"/>
-            </a:effectRef>
-            <a:fontRef idx="minor">
-              <a:schemeClr val="tx1"/>
-            </a:fontRef>
-          </p:style>
-        </p:cxnSp>
-      </p:grpSp>
-      <p:pic>
-        <p:nvPicPr>
-          <p:cNvPr id="29" name="Graphic 28" descr="Wi-Fi">
-            <a:extLst>
-              <a:ext uri="{FF2B5EF4-FFF2-40B4-BE49-F238E27FC236}">
-                <a16:creationId xmlns:a16="http://schemas.microsoft.com/office/drawing/2014/main" id="{2B0BA56A-0C50-4C84-AFE0-2683FC06C7F4}"/>
-              </a:ext>
-            </a:extLst>
-          </p:cNvPr>
-          <p:cNvPicPr>
-            <a:picLocks noChangeAspect="1"/>
-          </p:cNvPicPr>
-          <p:nvPr/>
-        </p:nvPicPr>
-        <p:blipFill>
-          <a:blip r:embed="rId4">
-            <a:extLst>
-              <a:ext uri="{96DAC541-7B7A-43D3-8B79-37D633B846F1}">
-                <asvg:svgBlip xmlns:asvg="http://schemas.microsoft.com/office/drawing/2016/SVG/main" r:embed="rId5"/>
-              </a:ext>
-            </a:extLst>
-          </a:blip>
-          <a:stretch>
-            <a:fillRect/>
-          </a:stretch>
-        </p:blipFill>
-        <p:spPr>
-          <a:xfrm rot="10030935">
             <a:off x="6577342" y="2468926"/>
             <a:ext cx="914400" cy="914400"/>
           </a:xfrm>
@@ -7395,13 +5921,13 @@
   <p:clrMapOvr>
     <a:masterClrMapping/>
   </p:clrMapOvr>
-  <mc:AlternateContent xmlns:mc="http://schemas.openxmlformats.org/markup-compatibility/2006">
-    <mc:Choice xmlns:p159="http://schemas.microsoft.com/office/powerpoint/2015/09/main" Requires="p159">
+  <mc:AlternateContent xmlns:mc="http://schemas.openxmlformats.org/markup-compatibility/2006" xmlns:p159="http://schemas.microsoft.com/office/powerpoint/2015/09/main">
+    <mc:Choice Requires="p159">
       <p:transition xmlns:p14="http://schemas.microsoft.com/office/powerpoint/2010/main" spd="slow" p14:dur="2000">
         <p159:morph option="byObject"/>
       </p:transition>
     </mc:Choice>
-    <mc:Fallback>
+    <mc:Fallback xmlns="">
       <p:transition spd="slow">
         <p:fade/>
       </p:transition>
@@ -7411,525 +5937,6 @@
 </file>
 
 <file path=ppt/slides/slide2.xml><?xml version="1.0" encoding="utf-8"?>
-<p:sld xmlns:a="http://schemas.openxmlformats.org/drawingml/2006/main" xmlns:r="http://schemas.openxmlformats.org/officeDocument/2006/relationships" xmlns:p="http://schemas.openxmlformats.org/presentationml/2006/main">
-  <p:cSld>
-    <p:spTree>
-      <p:nvGrpSpPr>
-        <p:cNvPr id="1" name=""/>
-        <p:cNvGrpSpPr/>
-        <p:nvPr/>
-      </p:nvGrpSpPr>
-      <p:grpSpPr>
-        <a:xfrm>
-          <a:off x="0" y="0"/>
-          <a:ext cx="0" cy="0"/>
-          <a:chOff x="0" y="0"/>
-          <a:chExt cx="0" cy="0"/>
-        </a:xfrm>
-      </p:grpSpPr>
-      <p:sp>
-        <p:nvSpPr>
-          <p:cNvPr id="3" name="Title 2">
-            <a:extLst>
-              <a:ext uri="{FF2B5EF4-FFF2-40B4-BE49-F238E27FC236}">
-                <a16:creationId xmlns:a16="http://schemas.microsoft.com/office/drawing/2014/main" id="{E3EA8F3D-5E80-47FC-B604-B77B30D5F33E}"/>
-              </a:ext>
-            </a:extLst>
-          </p:cNvPr>
-          <p:cNvSpPr>
-            <a:spLocks noGrp="1"/>
-          </p:cNvSpPr>
-          <p:nvPr>
-            <p:ph type="title"/>
-          </p:nvPr>
-        </p:nvSpPr>
-        <p:spPr>
-          <a:xfrm>
-            <a:off x="500446" y="400840"/>
-            <a:ext cx="6526336" cy="826598"/>
-          </a:xfrm>
-        </p:spPr>
-        <p:txBody>
-          <a:bodyPr/>
-          <a:lstStyle/>
-          <a:p>
-            <a:r>
-              <a:rPr lang="en-US" sz="4800" dirty="0">
-                <a:latin typeface="Calibri" panose="020F0502020204030204" pitchFamily="34" charset="0"/>
-                <a:cs typeface="Calibri" panose="020F0502020204030204" pitchFamily="34" charset="0"/>
-              </a:rPr>
-              <a:t>Deployment Patterns</a:t>
-            </a:r>
-          </a:p>
-        </p:txBody>
-      </p:sp>
-      <p:sp>
-        <p:nvSpPr>
-          <p:cNvPr id="2" name="Oval 1">
-            <a:extLst>
-              <a:ext uri="{FF2B5EF4-FFF2-40B4-BE49-F238E27FC236}">
-                <a16:creationId xmlns:a16="http://schemas.microsoft.com/office/drawing/2014/main" id="{87DAE7D2-A10C-459D-8AFC-ED453DFC031A}"/>
-              </a:ext>
-            </a:extLst>
-          </p:cNvPr>
-          <p:cNvSpPr/>
-          <p:nvPr/>
-        </p:nvSpPr>
-        <p:spPr>
-          <a:xfrm>
-            <a:off x="1235676" y="2347784"/>
-            <a:ext cx="313038" cy="296562"/>
-          </a:xfrm>
-          <a:prstGeom prst="ellipse">
-            <a:avLst/>
-          </a:prstGeom>
-          <a:solidFill>
-            <a:schemeClr val="accent3"/>
-          </a:solidFill>
-          <a:ln>
-            <a:solidFill>
-              <a:schemeClr val="accent3">
-                <a:lumMod val="60000"/>
-                <a:lumOff val="40000"/>
-              </a:schemeClr>
-            </a:solidFill>
-          </a:ln>
-        </p:spPr>
-        <p:style>
-          <a:lnRef idx="2">
-            <a:schemeClr val="accent1">
-              <a:shade val="50000"/>
-            </a:schemeClr>
-          </a:lnRef>
-          <a:fillRef idx="1">
-            <a:schemeClr val="accent1"/>
-          </a:fillRef>
-          <a:effectRef idx="0">
-            <a:schemeClr val="accent1"/>
-          </a:effectRef>
-          <a:fontRef idx="minor">
-            <a:schemeClr val="lt1"/>
-          </a:fontRef>
-        </p:style>
-        <p:txBody>
-          <a:bodyPr rtlCol="0" anchor="ctr"/>
-          <a:lstStyle/>
-          <a:p>
-            <a:pPr algn="ctr"/>
-            <a:endParaRPr lang="en-US"/>
-          </a:p>
-        </p:txBody>
-      </p:sp>
-      <p:sp>
-        <p:nvSpPr>
-          <p:cNvPr id="5" name="Oval 4">
-            <a:extLst>
-              <a:ext uri="{FF2B5EF4-FFF2-40B4-BE49-F238E27FC236}">
-                <a16:creationId xmlns:a16="http://schemas.microsoft.com/office/drawing/2014/main" id="{1A359B55-24EE-4E3B-B067-9CFE5D5564E9}"/>
-              </a:ext>
-            </a:extLst>
-          </p:cNvPr>
-          <p:cNvSpPr/>
-          <p:nvPr/>
-        </p:nvSpPr>
-        <p:spPr>
-          <a:xfrm>
-            <a:off x="1672282" y="3805882"/>
-            <a:ext cx="313038" cy="296562"/>
-          </a:xfrm>
-          <a:prstGeom prst="ellipse">
-            <a:avLst/>
-          </a:prstGeom>
-          <a:solidFill>
-            <a:schemeClr val="accent3"/>
-          </a:solidFill>
-          <a:ln>
-            <a:solidFill>
-              <a:schemeClr val="accent3">
-                <a:lumMod val="60000"/>
-                <a:lumOff val="40000"/>
-              </a:schemeClr>
-            </a:solidFill>
-          </a:ln>
-        </p:spPr>
-        <p:style>
-          <a:lnRef idx="2">
-            <a:schemeClr val="accent1">
-              <a:shade val="50000"/>
-            </a:schemeClr>
-          </a:lnRef>
-          <a:fillRef idx="1">
-            <a:schemeClr val="accent1"/>
-          </a:fillRef>
-          <a:effectRef idx="0">
-            <a:schemeClr val="accent1"/>
-          </a:effectRef>
-          <a:fontRef idx="minor">
-            <a:schemeClr val="lt1"/>
-          </a:fontRef>
-        </p:style>
-        <p:txBody>
-          <a:bodyPr rtlCol="0" anchor="ctr"/>
-          <a:lstStyle/>
-          <a:p>
-            <a:pPr algn="ctr"/>
-            <a:endParaRPr lang="en-US"/>
-          </a:p>
-        </p:txBody>
-      </p:sp>
-      <p:sp>
-        <p:nvSpPr>
-          <p:cNvPr id="6" name="Oval 5">
-            <a:extLst>
-              <a:ext uri="{FF2B5EF4-FFF2-40B4-BE49-F238E27FC236}">
-                <a16:creationId xmlns:a16="http://schemas.microsoft.com/office/drawing/2014/main" id="{C9B3EA64-AE18-46F1-A2C2-32A45C56D4B7}"/>
-              </a:ext>
-            </a:extLst>
-          </p:cNvPr>
-          <p:cNvSpPr/>
-          <p:nvPr/>
-        </p:nvSpPr>
-        <p:spPr>
-          <a:xfrm>
-            <a:off x="2549612" y="2277762"/>
-            <a:ext cx="313038" cy="296562"/>
-          </a:xfrm>
-          <a:prstGeom prst="ellipse">
-            <a:avLst/>
-          </a:prstGeom>
-          <a:solidFill>
-            <a:schemeClr val="accent3"/>
-          </a:solidFill>
-          <a:ln>
-            <a:solidFill>
-              <a:schemeClr val="accent3">
-                <a:lumMod val="60000"/>
-                <a:lumOff val="40000"/>
-              </a:schemeClr>
-            </a:solidFill>
-          </a:ln>
-        </p:spPr>
-        <p:style>
-          <a:lnRef idx="2">
-            <a:schemeClr val="accent1">
-              <a:shade val="50000"/>
-            </a:schemeClr>
-          </a:lnRef>
-          <a:fillRef idx="1">
-            <a:schemeClr val="accent1"/>
-          </a:fillRef>
-          <a:effectRef idx="0">
-            <a:schemeClr val="accent1"/>
-          </a:effectRef>
-          <a:fontRef idx="minor">
-            <a:schemeClr val="lt1"/>
-          </a:fontRef>
-        </p:style>
-        <p:txBody>
-          <a:bodyPr rtlCol="0" anchor="ctr"/>
-          <a:lstStyle/>
-          <a:p>
-            <a:pPr algn="ctr"/>
-            <a:endParaRPr lang="en-US"/>
-          </a:p>
-        </p:txBody>
-      </p:sp>
-      <p:sp>
-        <p:nvSpPr>
-          <p:cNvPr id="7" name="Oval 6">
-            <a:extLst>
-              <a:ext uri="{FF2B5EF4-FFF2-40B4-BE49-F238E27FC236}">
-                <a16:creationId xmlns:a16="http://schemas.microsoft.com/office/drawing/2014/main" id="{72FBDB24-FA16-4E02-8A9C-ECFC90CE6B57}"/>
-              </a:ext>
-            </a:extLst>
-          </p:cNvPr>
-          <p:cNvSpPr/>
-          <p:nvPr/>
-        </p:nvSpPr>
-        <p:spPr>
-          <a:xfrm>
-            <a:off x="2796744" y="4460790"/>
-            <a:ext cx="313038" cy="296562"/>
-          </a:xfrm>
-          <a:prstGeom prst="ellipse">
-            <a:avLst/>
-          </a:prstGeom>
-          <a:solidFill>
-            <a:schemeClr val="accent3"/>
-          </a:solidFill>
-          <a:ln>
-            <a:solidFill>
-              <a:schemeClr val="accent3">
-                <a:lumMod val="60000"/>
-                <a:lumOff val="40000"/>
-              </a:schemeClr>
-            </a:solidFill>
-          </a:ln>
-        </p:spPr>
-        <p:style>
-          <a:lnRef idx="2">
-            <a:schemeClr val="accent1">
-              <a:shade val="50000"/>
-            </a:schemeClr>
-          </a:lnRef>
-          <a:fillRef idx="1">
-            <a:schemeClr val="accent1"/>
-          </a:fillRef>
-          <a:effectRef idx="0">
-            <a:schemeClr val="accent1"/>
-          </a:effectRef>
-          <a:fontRef idx="minor">
-            <a:schemeClr val="lt1"/>
-          </a:fontRef>
-        </p:style>
-        <p:txBody>
-          <a:bodyPr rtlCol="0" anchor="ctr"/>
-          <a:lstStyle/>
-          <a:p>
-            <a:pPr algn="ctr"/>
-            <a:endParaRPr lang="en-US"/>
-          </a:p>
-        </p:txBody>
-      </p:sp>
-      <p:sp>
-        <p:nvSpPr>
-          <p:cNvPr id="8" name="Oval 7">
-            <a:extLst>
-              <a:ext uri="{FF2B5EF4-FFF2-40B4-BE49-F238E27FC236}">
-                <a16:creationId xmlns:a16="http://schemas.microsoft.com/office/drawing/2014/main" id="{9677CED2-8202-4C3F-902F-52F46E35CF25}"/>
-              </a:ext>
-            </a:extLst>
-          </p:cNvPr>
-          <p:cNvSpPr/>
-          <p:nvPr/>
-        </p:nvSpPr>
-        <p:spPr>
-          <a:xfrm>
-            <a:off x="3089186" y="3113904"/>
-            <a:ext cx="313038" cy="296562"/>
-          </a:xfrm>
-          <a:prstGeom prst="ellipse">
-            <a:avLst/>
-          </a:prstGeom>
-          <a:solidFill>
-            <a:schemeClr val="accent3"/>
-          </a:solidFill>
-          <a:ln>
-            <a:solidFill>
-              <a:schemeClr val="accent3">
-                <a:lumMod val="60000"/>
-                <a:lumOff val="40000"/>
-              </a:schemeClr>
-            </a:solidFill>
-          </a:ln>
-        </p:spPr>
-        <p:style>
-          <a:lnRef idx="2">
-            <a:schemeClr val="accent1">
-              <a:shade val="50000"/>
-            </a:schemeClr>
-          </a:lnRef>
-          <a:fillRef idx="1">
-            <a:schemeClr val="accent1"/>
-          </a:fillRef>
-          <a:effectRef idx="0">
-            <a:schemeClr val="accent1"/>
-          </a:effectRef>
-          <a:fontRef idx="minor">
-            <a:schemeClr val="lt1"/>
-          </a:fontRef>
-        </p:style>
-        <p:txBody>
-          <a:bodyPr rtlCol="0" anchor="ctr"/>
-          <a:lstStyle/>
-          <a:p>
-            <a:pPr algn="ctr"/>
-            <a:endParaRPr lang="en-US"/>
-          </a:p>
-        </p:txBody>
-      </p:sp>
-      <p:sp>
-        <p:nvSpPr>
-          <p:cNvPr id="9" name="Oval 8">
-            <a:extLst>
-              <a:ext uri="{FF2B5EF4-FFF2-40B4-BE49-F238E27FC236}">
-                <a16:creationId xmlns:a16="http://schemas.microsoft.com/office/drawing/2014/main" id="{16793657-93CF-4754-9E10-C323570EDAED}"/>
-              </a:ext>
-            </a:extLst>
-          </p:cNvPr>
-          <p:cNvSpPr/>
-          <p:nvPr/>
-        </p:nvSpPr>
-        <p:spPr>
-          <a:xfrm>
-            <a:off x="4897391" y="3410466"/>
-            <a:ext cx="313038" cy="296562"/>
-          </a:xfrm>
-          <a:prstGeom prst="ellipse">
-            <a:avLst/>
-          </a:prstGeom>
-          <a:solidFill>
-            <a:schemeClr val="accent3"/>
-          </a:solidFill>
-          <a:ln>
-            <a:solidFill>
-              <a:schemeClr val="accent3">
-                <a:lumMod val="60000"/>
-                <a:lumOff val="40000"/>
-              </a:schemeClr>
-            </a:solidFill>
-          </a:ln>
-        </p:spPr>
-        <p:style>
-          <a:lnRef idx="2">
-            <a:schemeClr val="accent1">
-              <a:shade val="50000"/>
-            </a:schemeClr>
-          </a:lnRef>
-          <a:fillRef idx="1">
-            <a:schemeClr val="accent1"/>
-          </a:fillRef>
-          <a:effectRef idx="0">
-            <a:schemeClr val="accent1"/>
-          </a:effectRef>
-          <a:fontRef idx="minor">
-            <a:schemeClr val="lt1"/>
-          </a:fontRef>
-        </p:style>
-        <p:txBody>
-          <a:bodyPr rtlCol="0" anchor="ctr"/>
-          <a:lstStyle/>
-          <a:p>
-            <a:pPr algn="ctr"/>
-            <a:endParaRPr lang="en-US"/>
-          </a:p>
-        </p:txBody>
-      </p:sp>
-      <p:sp>
-        <p:nvSpPr>
-          <p:cNvPr id="10" name="Oval 9">
-            <a:extLst>
-              <a:ext uri="{FF2B5EF4-FFF2-40B4-BE49-F238E27FC236}">
-                <a16:creationId xmlns:a16="http://schemas.microsoft.com/office/drawing/2014/main" id="{C8F644F2-5801-43F5-A196-96EB64CDE77B}"/>
-              </a:ext>
-            </a:extLst>
-          </p:cNvPr>
-          <p:cNvSpPr/>
-          <p:nvPr/>
-        </p:nvSpPr>
-        <p:spPr>
-          <a:xfrm>
-            <a:off x="4155986" y="4308390"/>
-            <a:ext cx="313038" cy="296562"/>
-          </a:xfrm>
-          <a:prstGeom prst="ellipse">
-            <a:avLst/>
-          </a:prstGeom>
-          <a:solidFill>
-            <a:schemeClr val="accent3"/>
-          </a:solidFill>
-          <a:ln>
-            <a:solidFill>
-              <a:schemeClr val="accent3">
-                <a:lumMod val="60000"/>
-                <a:lumOff val="40000"/>
-              </a:schemeClr>
-            </a:solidFill>
-          </a:ln>
-        </p:spPr>
-        <p:style>
-          <a:lnRef idx="2">
-            <a:schemeClr val="accent1">
-              <a:shade val="50000"/>
-            </a:schemeClr>
-          </a:lnRef>
-          <a:fillRef idx="1">
-            <a:schemeClr val="accent1"/>
-          </a:fillRef>
-          <a:effectRef idx="0">
-            <a:schemeClr val="accent1"/>
-          </a:effectRef>
-          <a:fontRef idx="minor">
-            <a:schemeClr val="lt1"/>
-          </a:fontRef>
-        </p:style>
-        <p:txBody>
-          <a:bodyPr rtlCol="0" anchor="ctr"/>
-          <a:lstStyle/>
-          <a:p>
-            <a:pPr algn="ctr"/>
-            <a:endParaRPr lang="en-US"/>
-          </a:p>
-        </p:txBody>
-      </p:sp>
-      <p:sp>
-        <p:nvSpPr>
-          <p:cNvPr id="11" name="Oval 10">
-            <a:extLst>
-              <a:ext uri="{FF2B5EF4-FFF2-40B4-BE49-F238E27FC236}">
-                <a16:creationId xmlns:a16="http://schemas.microsoft.com/office/drawing/2014/main" id="{549B5A5E-C846-4C48-8807-CE1448AF1ABE}"/>
-              </a:ext>
-            </a:extLst>
-          </p:cNvPr>
-          <p:cNvSpPr/>
-          <p:nvPr/>
-        </p:nvSpPr>
-        <p:spPr>
-          <a:xfrm>
-            <a:off x="4155986" y="1981200"/>
-            <a:ext cx="313038" cy="296562"/>
-          </a:xfrm>
-          <a:prstGeom prst="ellipse">
-            <a:avLst/>
-          </a:prstGeom>
-          <a:solidFill>
-            <a:srgbClr val="00B050"/>
-          </a:solidFill>
-          <a:ln>
-            <a:solidFill>
-              <a:srgbClr val="00B050"/>
-            </a:solidFill>
-          </a:ln>
-        </p:spPr>
-        <p:style>
-          <a:lnRef idx="2">
-            <a:schemeClr val="accent1">
-              <a:shade val="50000"/>
-            </a:schemeClr>
-          </a:lnRef>
-          <a:fillRef idx="1">
-            <a:schemeClr val="accent1"/>
-          </a:fillRef>
-          <a:effectRef idx="0">
-            <a:schemeClr val="accent1"/>
-          </a:effectRef>
-          <a:fontRef idx="minor">
-            <a:schemeClr val="lt1"/>
-          </a:fontRef>
-        </p:style>
-        <p:txBody>
-          <a:bodyPr rtlCol="0" anchor="ctr"/>
-          <a:lstStyle/>
-          <a:p>
-            <a:pPr algn="ctr"/>
-            <a:endParaRPr lang="en-US"/>
-          </a:p>
-        </p:txBody>
-      </p:sp>
-    </p:spTree>
-    <p:extLst>
-      <p:ext uri="{BB962C8B-B14F-4D97-AF65-F5344CB8AC3E}">
-        <p14:creationId xmlns:p14="http://schemas.microsoft.com/office/powerpoint/2010/main" val="719883160"/>
-      </p:ext>
-    </p:extLst>
-  </p:cSld>
-  <p:clrMapOvr>
-    <a:masterClrMapping/>
-  </p:clrMapOvr>
-</p:sld>
-</file>
-
-<file path=ppt/slides/slide3.xml><?xml version="1.0" encoding="utf-8"?>
 <p:sld xmlns:a="http://schemas.openxmlformats.org/drawingml/2006/main" xmlns:r="http://schemas.openxmlformats.org/officeDocument/2006/relationships" xmlns:p="http://schemas.openxmlformats.org/presentationml/2006/main">
   <p:cSld>
     <p:spTree>
@@ -9314,7 +7321,7 @@
 </p:sld>
 </file>
 
-<file path=ppt/slides/slide4.xml><?xml version="1.0" encoding="utf-8"?>
+<file path=ppt/slides/slide3.xml><?xml version="1.0" encoding="utf-8"?>
 <p:sld xmlns:a="http://schemas.openxmlformats.org/drawingml/2006/main" xmlns:r="http://schemas.openxmlformats.org/officeDocument/2006/relationships" xmlns:p="http://schemas.openxmlformats.org/presentationml/2006/main">
   <p:cSld>
     <p:spTree>
@@ -10732,7 +8739,7 @@
 </p:sld>
 </file>
 
-<file path=ppt/slides/slide5.xml><?xml version="1.0" encoding="utf-8"?>
+<file path=ppt/slides/slide4.xml><?xml version="1.0" encoding="utf-8"?>
 <p:sld xmlns:a="http://schemas.openxmlformats.org/drawingml/2006/main" xmlns:r="http://schemas.openxmlformats.org/officeDocument/2006/relationships" xmlns:p="http://schemas.openxmlformats.org/presentationml/2006/main">
   <p:cSld>
     <p:spTree>
@@ -12942,7 +10949,7 @@
 </p:sld>
 </file>
 
-<file path=ppt/slides/slide6.xml><?xml version="1.0" encoding="utf-8"?>
+<file path=ppt/slides/slide5.xml><?xml version="1.0" encoding="utf-8"?>
 <p:sld xmlns:a="http://schemas.openxmlformats.org/drawingml/2006/main" xmlns:r="http://schemas.openxmlformats.org/officeDocument/2006/relationships" xmlns:p="http://schemas.openxmlformats.org/presentationml/2006/main">
   <p:cSld>
     <p:spTree>
@@ -14177,13 +12184,13 @@
   <p:clrMapOvr>
     <a:masterClrMapping/>
   </p:clrMapOvr>
-  <mc:AlternateContent xmlns:mc="http://schemas.openxmlformats.org/markup-compatibility/2006">
-    <mc:Choice xmlns:p159="http://schemas.microsoft.com/office/powerpoint/2015/09/main" Requires="p159">
+  <mc:AlternateContent xmlns:mc="http://schemas.openxmlformats.org/markup-compatibility/2006" xmlns:p159="http://schemas.microsoft.com/office/powerpoint/2015/09/main">
+    <mc:Choice Requires="p159">
       <p:transition xmlns:p14="http://schemas.microsoft.com/office/powerpoint/2010/main" spd="slow" p14:dur="2000">
         <p159:morph option="byObject"/>
       </p:transition>
     </mc:Choice>
-    <mc:Fallback>
+    <mc:Fallback xmlns="">
       <p:transition spd="slow">
         <p:fade/>
       </p:transition>
@@ -14192,7 +12199,7 @@
 </p:sld>
 </file>
 
-<file path=ppt/slides/slide7.xml><?xml version="1.0" encoding="utf-8"?>
+<file path=ppt/slides/slide6.xml><?xml version="1.0" encoding="utf-8"?>
 <p:sld xmlns:a="http://schemas.openxmlformats.org/drawingml/2006/main" xmlns:r="http://schemas.openxmlformats.org/officeDocument/2006/relationships" xmlns:p="http://schemas.openxmlformats.org/presentationml/2006/main">
   <p:cSld>
     <p:spTree>
@@ -15319,13 +13326,13 @@
   <p:clrMapOvr>
     <a:masterClrMapping/>
   </p:clrMapOvr>
-  <mc:AlternateContent xmlns:mc="http://schemas.openxmlformats.org/markup-compatibility/2006">
-    <mc:Choice xmlns:p159="http://schemas.microsoft.com/office/powerpoint/2015/09/main" Requires="p159">
+  <mc:AlternateContent xmlns:mc="http://schemas.openxmlformats.org/markup-compatibility/2006" xmlns:p159="http://schemas.microsoft.com/office/powerpoint/2015/09/main">
+    <mc:Choice Requires="p159">
       <p:transition xmlns:p14="http://schemas.microsoft.com/office/powerpoint/2010/main" spd="slow" p14:dur="2000">
         <p159:morph option="byObject"/>
       </p:transition>
     </mc:Choice>
-    <mc:Fallback>
+    <mc:Fallback xmlns="">
       <p:transition spd="slow">
         <p:fade/>
       </p:transition>
@@ -15334,7 +13341,7 @@
 </p:sld>
 </file>
 
-<file path=ppt/slides/slide8.xml><?xml version="1.0" encoding="utf-8"?>
+<file path=ppt/slides/slide7.xml><?xml version="1.0" encoding="utf-8"?>
 <p:sld xmlns:a="http://schemas.openxmlformats.org/drawingml/2006/main" xmlns:r="http://schemas.openxmlformats.org/officeDocument/2006/relationships" xmlns:p="http://schemas.openxmlformats.org/presentationml/2006/main">
   <p:cSld>
     <p:spTree>
@@ -16717,13 +14724,13 @@
   <p:clrMapOvr>
     <a:masterClrMapping/>
   </p:clrMapOvr>
-  <mc:AlternateContent xmlns:mc="http://schemas.openxmlformats.org/markup-compatibility/2006">
-    <mc:Choice xmlns:p159="http://schemas.microsoft.com/office/powerpoint/2015/09/main" Requires="p159">
+  <mc:AlternateContent xmlns:mc="http://schemas.openxmlformats.org/markup-compatibility/2006" xmlns:p159="http://schemas.microsoft.com/office/powerpoint/2015/09/main">
+    <mc:Choice Requires="p159">
       <p:transition xmlns:p14="http://schemas.microsoft.com/office/powerpoint/2010/main" spd="slow" p14:dur="2000">
         <p159:morph option="byObject"/>
       </p:transition>
     </mc:Choice>
-    <mc:Fallback>
+    <mc:Fallback xmlns="">
       <p:transition spd="slow">
         <p:fade/>
       </p:transition>
@@ -16884,7 +14891,7 @@
 </p:sld>
 </file>
 
-<file path=ppt/slides/slide9.xml><?xml version="1.0" encoding="utf-8"?>
+<file path=ppt/slides/slide8.xml><?xml version="1.0" encoding="utf-8"?>
 <p:sld xmlns:a="http://schemas.openxmlformats.org/drawingml/2006/main" xmlns:r="http://schemas.openxmlformats.org/officeDocument/2006/relationships" xmlns:p="http://schemas.openxmlformats.org/presentationml/2006/main">
   <p:cSld>
     <p:spTree>
@@ -17912,6 +15919,1049 @@
   <p:clrMapOvr>
     <a:masterClrMapping/>
   </p:clrMapOvr>
+</p:sld>
+</file>
+
+<file path=ppt/slides/slide9.xml><?xml version="1.0" encoding="utf-8"?>
+<p:sld xmlns:a="http://schemas.openxmlformats.org/drawingml/2006/main" xmlns:r="http://schemas.openxmlformats.org/officeDocument/2006/relationships" xmlns:p="http://schemas.openxmlformats.org/presentationml/2006/main">
+  <p:cSld>
+    <p:spTree>
+      <p:nvGrpSpPr>
+        <p:cNvPr id="1" name=""/>
+        <p:cNvGrpSpPr/>
+        <p:nvPr/>
+      </p:nvGrpSpPr>
+      <p:grpSpPr>
+        <a:xfrm>
+          <a:off x="0" y="0"/>
+          <a:ext cx="0" cy="0"/>
+          <a:chOff x="0" y="0"/>
+          <a:chExt cx="0" cy="0"/>
+        </a:xfrm>
+      </p:grpSpPr>
+      <p:sp>
+        <p:nvSpPr>
+          <p:cNvPr id="3" name="Title 2">
+            <a:extLst>
+              <a:ext uri="{FF2B5EF4-FFF2-40B4-BE49-F238E27FC236}">
+                <a16:creationId xmlns:a16="http://schemas.microsoft.com/office/drawing/2014/main" id="{E3EA8F3D-5E80-47FC-B604-B77B30D5F33E}"/>
+              </a:ext>
+            </a:extLst>
+          </p:cNvPr>
+          <p:cNvSpPr>
+            <a:spLocks noGrp="1"/>
+          </p:cNvSpPr>
+          <p:nvPr>
+            <p:ph type="title"/>
+          </p:nvPr>
+        </p:nvSpPr>
+        <p:spPr>
+          <a:xfrm>
+            <a:off x="579780" y="977488"/>
+            <a:ext cx="6526336" cy="826598"/>
+          </a:xfrm>
+        </p:spPr>
+        <p:txBody>
+          <a:bodyPr/>
+          <a:lstStyle/>
+          <a:p>
+            <a:r>
+              <a:rPr lang="en-US" sz="4800" dirty="0">
+                <a:latin typeface="Calibri" panose="020F0502020204030204" pitchFamily="34" charset="0"/>
+                <a:cs typeface="Calibri" panose="020F0502020204030204" pitchFamily="34" charset="0"/>
+              </a:rPr>
+              <a:t>Deployment Patterns – Data Mule</a:t>
+            </a:r>
+          </a:p>
+        </p:txBody>
+      </p:sp>
+      <p:sp>
+        <p:nvSpPr>
+          <p:cNvPr id="2" name="Oval 1">
+            <a:extLst>
+              <a:ext uri="{FF2B5EF4-FFF2-40B4-BE49-F238E27FC236}">
+                <a16:creationId xmlns:a16="http://schemas.microsoft.com/office/drawing/2014/main" id="{87DAE7D2-A10C-459D-8AFC-ED453DFC031A}"/>
+              </a:ext>
+            </a:extLst>
+          </p:cNvPr>
+          <p:cNvSpPr/>
+          <p:nvPr/>
+        </p:nvSpPr>
+        <p:spPr>
+          <a:xfrm>
+            <a:off x="1235676" y="2347784"/>
+            <a:ext cx="313038" cy="296562"/>
+          </a:xfrm>
+          <a:prstGeom prst="ellipse">
+            <a:avLst/>
+          </a:prstGeom>
+          <a:solidFill>
+            <a:schemeClr val="accent3"/>
+          </a:solidFill>
+          <a:ln>
+            <a:solidFill>
+              <a:schemeClr val="accent3">
+                <a:lumMod val="60000"/>
+                <a:lumOff val="40000"/>
+              </a:schemeClr>
+            </a:solidFill>
+          </a:ln>
+        </p:spPr>
+        <p:style>
+          <a:lnRef idx="2">
+            <a:schemeClr val="accent1">
+              <a:shade val="50000"/>
+            </a:schemeClr>
+          </a:lnRef>
+          <a:fillRef idx="1">
+            <a:schemeClr val="accent1"/>
+          </a:fillRef>
+          <a:effectRef idx="0">
+            <a:schemeClr val="accent1"/>
+          </a:effectRef>
+          <a:fontRef idx="minor">
+            <a:schemeClr val="lt1"/>
+          </a:fontRef>
+        </p:style>
+        <p:txBody>
+          <a:bodyPr rtlCol="0" anchor="ctr"/>
+          <a:lstStyle/>
+          <a:p>
+            <a:pPr algn="ctr"/>
+            <a:endParaRPr lang="en-US"/>
+          </a:p>
+        </p:txBody>
+      </p:sp>
+      <p:sp>
+        <p:nvSpPr>
+          <p:cNvPr id="5" name="Oval 4">
+            <a:extLst>
+              <a:ext uri="{FF2B5EF4-FFF2-40B4-BE49-F238E27FC236}">
+                <a16:creationId xmlns:a16="http://schemas.microsoft.com/office/drawing/2014/main" id="{1A359B55-24EE-4E3B-B067-9CFE5D5564E9}"/>
+              </a:ext>
+            </a:extLst>
+          </p:cNvPr>
+          <p:cNvSpPr/>
+          <p:nvPr/>
+        </p:nvSpPr>
+        <p:spPr>
+          <a:xfrm>
+            <a:off x="1392195" y="4786184"/>
+            <a:ext cx="313038" cy="296562"/>
+          </a:xfrm>
+          <a:prstGeom prst="ellipse">
+            <a:avLst/>
+          </a:prstGeom>
+          <a:solidFill>
+            <a:schemeClr val="accent3"/>
+          </a:solidFill>
+          <a:ln>
+            <a:solidFill>
+              <a:schemeClr val="accent3">
+                <a:lumMod val="60000"/>
+                <a:lumOff val="40000"/>
+              </a:schemeClr>
+            </a:solidFill>
+          </a:ln>
+        </p:spPr>
+        <p:style>
+          <a:lnRef idx="2">
+            <a:schemeClr val="accent1">
+              <a:shade val="50000"/>
+            </a:schemeClr>
+          </a:lnRef>
+          <a:fillRef idx="1">
+            <a:schemeClr val="accent1"/>
+          </a:fillRef>
+          <a:effectRef idx="0">
+            <a:schemeClr val="accent1"/>
+          </a:effectRef>
+          <a:fontRef idx="minor">
+            <a:schemeClr val="lt1"/>
+          </a:fontRef>
+        </p:style>
+        <p:txBody>
+          <a:bodyPr rtlCol="0" anchor="ctr"/>
+          <a:lstStyle/>
+          <a:p>
+            <a:pPr algn="ctr"/>
+            <a:endParaRPr lang="en-US"/>
+          </a:p>
+        </p:txBody>
+      </p:sp>
+      <p:sp>
+        <p:nvSpPr>
+          <p:cNvPr id="6" name="Oval 5">
+            <a:extLst>
+              <a:ext uri="{FF2B5EF4-FFF2-40B4-BE49-F238E27FC236}">
+                <a16:creationId xmlns:a16="http://schemas.microsoft.com/office/drawing/2014/main" id="{C9B3EA64-AE18-46F1-A2C2-32A45C56D4B7}"/>
+              </a:ext>
+            </a:extLst>
+          </p:cNvPr>
+          <p:cNvSpPr/>
+          <p:nvPr/>
+        </p:nvSpPr>
+        <p:spPr>
+          <a:xfrm>
+            <a:off x="2549612" y="2277762"/>
+            <a:ext cx="313038" cy="296562"/>
+          </a:xfrm>
+          <a:prstGeom prst="ellipse">
+            <a:avLst/>
+          </a:prstGeom>
+          <a:solidFill>
+            <a:schemeClr val="accent3"/>
+          </a:solidFill>
+          <a:ln>
+            <a:solidFill>
+              <a:schemeClr val="accent3">
+                <a:lumMod val="60000"/>
+                <a:lumOff val="40000"/>
+              </a:schemeClr>
+            </a:solidFill>
+          </a:ln>
+        </p:spPr>
+        <p:style>
+          <a:lnRef idx="2">
+            <a:schemeClr val="accent1">
+              <a:shade val="50000"/>
+            </a:schemeClr>
+          </a:lnRef>
+          <a:fillRef idx="1">
+            <a:schemeClr val="accent1"/>
+          </a:fillRef>
+          <a:effectRef idx="0">
+            <a:schemeClr val="accent1"/>
+          </a:effectRef>
+          <a:fontRef idx="minor">
+            <a:schemeClr val="lt1"/>
+          </a:fontRef>
+        </p:style>
+        <p:txBody>
+          <a:bodyPr rtlCol="0" anchor="ctr"/>
+          <a:lstStyle/>
+          <a:p>
+            <a:pPr algn="ctr"/>
+            <a:endParaRPr lang="en-US"/>
+          </a:p>
+        </p:txBody>
+      </p:sp>
+      <p:sp>
+        <p:nvSpPr>
+          <p:cNvPr id="7" name="Oval 6">
+            <a:extLst>
+              <a:ext uri="{FF2B5EF4-FFF2-40B4-BE49-F238E27FC236}">
+                <a16:creationId xmlns:a16="http://schemas.microsoft.com/office/drawing/2014/main" id="{72FBDB24-FA16-4E02-8A9C-ECFC90CE6B57}"/>
+              </a:ext>
+            </a:extLst>
+          </p:cNvPr>
+          <p:cNvSpPr/>
+          <p:nvPr/>
+        </p:nvSpPr>
+        <p:spPr>
+          <a:xfrm>
+            <a:off x="2722596" y="4695561"/>
+            <a:ext cx="313038" cy="296562"/>
+          </a:xfrm>
+          <a:prstGeom prst="ellipse">
+            <a:avLst/>
+          </a:prstGeom>
+          <a:solidFill>
+            <a:schemeClr val="accent3"/>
+          </a:solidFill>
+          <a:ln>
+            <a:solidFill>
+              <a:schemeClr val="accent3">
+                <a:lumMod val="60000"/>
+                <a:lumOff val="40000"/>
+              </a:schemeClr>
+            </a:solidFill>
+          </a:ln>
+        </p:spPr>
+        <p:style>
+          <a:lnRef idx="2">
+            <a:schemeClr val="accent1">
+              <a:shade val="50000"/>
+            </a:schemeClr>
+          </a:lnRef>
+          <a:fillRef idx="1">
+            <a:schemeClr val="accent1"/>
+          </a:fillRef>
+          <a:effectRef idx="0">
+            <a:schemeClr val="accent1"/>
+          </a:effectRef>
+          <a:fontRef idx="minor">
+            <a:schemeClr val="lt1"/>
+          </a:fontRef>
+        </p:style>
+        <p:txBody>
+          <a:bodyPr rtlCol="0" anchor="ctr"/>
+          <a:lstStyle/>
+          <a:p>
+            <a:pPr algn="ctr"/>
+            <a:endParaRPr lang="en-US"/>
+          </a:p>
+        </p:txBody>
+      </p:sp>
+      <p:sp>
+        <p:nvSpPr>
+          <p:cNvPr id="8" name="Oval 7">
+            <a:extLst>
+              <a:ext uri="{FF2B5EF4-FFF2-40B4-BE49-F238E27FC236}">
+                <a16:creationId xmlns:a16="http://schemas.microsoft.com/office/drawing/2014/main" id="{9677CED2-8202-4C3F-902F-52F46E35CF25}"/>
+              </a:ext>
+            </a:extLst>
+          </p:cNvPr>
+          <p:cNvSpPr/>
+          <p:nvPr/>
+        </p:nvSpPr>
+        <p:spPr>
+          <a:xfrm>
+            <a:off x="4102437" y="2199503"/>
+            <a:ext cx="313038" cy="296562"/>
+          </a:xfrm>
+          <a:prstGeom prst="ellipse">
+            <a:avLst/>
+          </a:prstGeom>
+          <a:solidFill>
+            <a:schemeClr val="accent3"/>
+          </a:solidFill>
+          <a:ln>
+            <a:solidFill>
+              <a:schemeClr val="accent3">
+                <a:lumMod val="60000"/>
+                <a:lumOff val="40000"/>
+              </a:schemeClr>
+            </a:solidFill>
+          </a:ln>
+        </p:spPr>
+        <p:style>
+          <a:lnRef idx="2">
+            <a:schemeClr val="accent1">
+              <a:shade val="50000"/>
+            </a:schemeClr>
+          </a:lnRef>
+          <a:fillRef idx="1">
+            <a:schemeClr val="accent1"/>
+          </a:fillRef>
+          <a:effectRef idx="0">
+            <a:schemeClr val="accent1"/>
+          </a:effectRef>
+          <a:fontRef idx="minor">
+            <a:schemeClr val="lt1"/>
+          </a:fontRef>
+        </p:style>
+        <p:txBody>
+          <a:bodyPr rtlCol="0" anchor="ctr"/>
+          <a:lstStyle/>
+          <a:p>
+            <a:pPr algn="ctr"/>
+            <a:endParaRPr lang="en-US"/>
+          </a:p>
+        </p:txBody>
+      </p:sp>
+      <p:sp>
+        <p:nvSpPr>
+          <p:cNvPr id="9" name="Oval 8">
+            <a:extLst>
+              <a:ext uri="{FF2B5EF4-FFF2-40B4-BE49-F238E27FC236}">
+                <a16:creationId xmlns:a16="http://schemas.microsoft.com/office/drawing/2014/main" id="{16793657-93CF-4754-9E10-C323570EDAED}"/>
+              </a:ext>
+            </a:extLst>
+          </p:cNvPr>
+          <p:cNvSpPr/>
+          <p:nvPr/>
+        </p:nvSpPr>
+        <p:spPr>
+          <a:xfrm>
+            <a:off x="3643178" y="4670841"/>
+            <a:ext cx="313038" cy="296562"/>
+          </a:xfrm>
+          <a:prstGeom prst="ellipse">
+            <a:avLst/>
+          </a:prstGeom>
+          <a:solidFill>
+            <a:schemeClr val="accent3"/>
+          </a:solidFill>
+          <a:ln>
+            <a:solidFill>
+              <a:schemeClr val="accent3">
+                <a:lumMod val="60000"/>
+                <a:lumOff val="40000"/>
+              </a:schemeClr>
+            </a:solidFill>
+          </a:ln>
+        </p:spPr>
+        <p:style>
+          <a:lnRef idx="2">
+            <a:schemeClr val="accent1">
+              <a:shade val="50000"/>
+            </a:schemeClr>
+          </a:lnRef>
+          <a:fillRef idx="1">
+            <a:schemeClr val="accent1"/>
+          </a:fillRef>
+          <a:effectRef idx="0">
+            <a:schemeClr val="accent1"/>
+          </a:effectRef>
+          <a:fontRef idx="minor">
+            <a:schemeClr val="lt1"/>
+          </a:fontRef>
+        </p:style>
+        <p:txBody>
+          <a:bodyPr rtlCol="0" anchor="ctr"/>
+          <a:lstStyle/>
+          <a:p>
+            <a:pPr algn="ctr"/>
+            <a:endParaRPr lang="en-US"/>
+          </a:p>
+        </p:txBody>
+      </p:sp>
+      <p:sp>
+        <p:nvSpPr>
+          <p:cNvPr id="10" name="Oval 9">
+            <a:extLst>
+              <a:ext uri="{FF2B5EF4-FFF2-40B4-BE49-F238E27FC236}">
+                <a16:creationId xmlns:a16="http://schemas.microsoft.com/office/drawing/2014/main" id="{C8F644F2-5801-43F5-A196-96EB64CDE77B}"/>
+              </a:ext>
+            </a:extLst>
+          </p:cNvPr>
+          <p:cNvSpPr/>
+          <p:nvPr/>
+        </p:nvSpPr>
+        <p:spPr>
+          <a:xfrm>
+            <a:off x="4740872" y="4670841"/>
+            <a:ext cx="313038" cy="296562"/>
+          </a:xfrm>
+          <a:prstGeom prst="ellipse">
+            <a:avLst/>
+          </a:prstGeom>
+          <a:solidFill>
+            <a:schemeClr val="accent3"/>
+          </a:solidFill>
+          <a:ln>
+            <a:solidFill>
+              <a:schemeClr val="accent3">
+                <a:lumMod val="60000"/>
+                <a:lumOff val="40000"/>
+              </a:schemeClr>
+            </a:solidFill>
+          </a:ln>
+        </p:spPr>
+        <p:style>
+          <a:lnRef idx="2">
+            <a:schemeClr val="accent1">
+              <a:shade val="50000"/>
+            </a:schemeClr>
+          </a:lnRef>
+          <a:fillRef idx="1">
+            <a:schemeClr val="accent1"/>
+          </a:fillRef>
+          <a:effectRef idx="0">
+            <a:schemeClr val="accent1"/>
+          </a:effectRef>
+          <a:fontRef idx="minor">
+            <a:schemeClr val="lt1"/>
+          </a:fontRef>
+        </p:style>
+        <p:txBody>
+          <a:bodyPr rtlCol="0" anchor="ctr"/>
+          <a:lstStyle/>
+          <a:p>
+            <a:pPr algn="ctr"/>
+            <a:endParaRPr lang="en-US"/>
+          </a:p>
+        </p:txBody>
+      </p:sp>
+      <p:sp>
+        <p:nvSpPr>
+          <p:cNvPr id="11" name="Oval 10">
+            <a:extLst>
+              <a:ext uri="{FF2B5EF4-FFF2-40B4-BE49-F238E27FC236}">
+                <a16:creationId xmlns:a16="http://schemas.microsoft.com/office/drawing/2014/main" id="{549B5A5E-C846-4C48-8807-CE1448AF1ABE}"/>
+              </a:ext>
+            </a:extLst>
+          </p:cNvPr>
+          <p:cNvSpPr/>
+          <p:nvPr/>
+        </p:nvSpPr>
+        <p:spPr>
+          <a:xfrm>
+            <a:off x="8114249" y="2644346"/>
+            <a:ext cx="313038" cy="296562"/>
+          </a:xfrm>
+          <a:prstGeom prst="ellipse">
+            <a:avLst/>
+          </a:prstGeom>
+          <a:solidFill>
+            <a:srgbClr val="00B050"/>
+          </a:solidFill>
+          <a:ln>
+            <a:solidFill>
+              <a:srgbClr val="00B050"/>
+            </a:solidFill>
+          </a:ln>
+        </p:spPr>
+        <p:style>
+          <a:lnRef idx="2">
+            <a:schemeClr val="accent1">
+              <a:shade val="50000"/>
+            </a:schemeClr>
+          </a:lnRef>
+          <a:fillRef idx="1">
+            <a:schemeClr val="accent1"/>
+          </a:fillRef>
+          <a:effectRef idx="0">
+            <a:schemeClr val="accent1"/>
+          </a:effectRef>
+          <a:fontRef idx="minor">
+            <a:schemeClr val="lt1"/>
+          </a:fontRef>
+        </p:style>
+        <p:txBody>
+          <a:bodyPr rtlCol="0" anchor="ctr"/>
+          <a:lstStyle/>
+          <a:p>
+            <a:pPr algn="ctr"/>
+            <a:endParaRPr lang="en-US"/>
+          </a:p>
+        </p:txBody>
+      </p:sp>
+      <p:sp>
+        <p:nvSpPr>
+          <p:cNvPr id="12" name="Oval 11">
+            <a:extLst>
+              <a:ext uri="{FF2B5EF4-FFF2-40B4-BE49-F238E27FC236}">
+                <a16:creationId xmlns:a16="http://schemas.microsoft.com/office/drawing/2014/main" id="{9F67D8B5-67E7-4553-BC03-32CC50BA14DA}"/>
+              </a:ext>
+            </a:extLst>
+          </p:cNvPr>
+          <p:cNvSpPr/>
+          <p:nvPr/>
+        </p:nvSpPr>
+        <p:spPr>
+          <a:xfrm>
+            <a:off x="5539934" y="4765583"/>
+            <a:ext cx="313038" cy="296562"/>
+          </a:xfrm>
+          <a:prstGeom prst="ellipse">
+            <a:avLst/>
+          </a:prstGeom>
+          <a:solidFill>
+            <a:schemeClr val="accent3"/>
+          </a:solidFill>
+          <a:ln>
+            <a:solidFill>
+              <a:schemeClr val="accent3">
+                <a:lumMod val="60000"/>
+                <a:lumOff val="40000"/>
+              </a:schemeClr>
+            </a:solidFill>
+          </a:ln>
+        </p:spPr>
+        <p:style>
+          <a:lnRef idx="2">
+            <a:schemeClr val="accent1">
+              <a:shade val="50000"/>
+            </a:schemeClr>
+          </a:lnRef>
+          <a:fillRef idx="1">
+            <a:schemeClr val="accent1"/>
+          </a:fillRef>
+          <a:effectRef idx="0">
+            <a:schemeClr val="accent1"/>
+          </a:effectRef>
+          <a:fontRef idx="minor">
+            <a:schemeClr val="lt1"/>
+          </a:fontRef>
+        </p:style>
+        <p:txBody>
+          <a:bodyPr rtlCol="0" anchor="ctr"/>
+          <a:lstStyle/>
+          <a:p>
+            <a:pPr algn="ctr"/>
+            <a:endParaRPr lang="en-US"/>
+          </a:p>
+        </p:txBody>
+      </p:sp>
+      <p:sp>
+        <p:nvSpPr>
+          <p:cNvPr id="13" name="Oval 12">
+            <a:extLst>
+              <a:ext uri="{FF2B5EF4-FFF2-40B4-BE49-F238E27FC236}">
+                <a16:creationId xmlns:a16="http://schemas.microsoft.com/office/drawing/2014/main" id="{9E0032CD-559B-471F-8187-504D07A41426}"/>
+              </a:ext>
+            </a:extLst>
+          </p:cNvPr>
+          <p:cNvSpPr/>
+          <p:nvPr/>
+        </p:nvSpPr>
+        <p:spPr>
+          <a:xfrm>
+            <a:off x="3326024" y="2209797"/>
+            <a:ext cx="313038" cy="296562"/>
+          </a:xfrm>
+          <a:prstGeom prst="ellipse">
+            <a:avLst/>
+          </a:prstGeom>
+          <a:solidFill>
+            <a:schemeClr val="accent3"/>
+          </a:solidFill>
+          <a:ln>
+            <a:solidFill>
+              <a:schemeClr val="accent3">
+                <a:lumMod val="60000"/>
+                <a:lumOff val="40000"/>
+              </a:schemeClr>
+            </a:solidFill>
+          </a:ln>
+        </p:spPr>
+        <p:style>
+          <a:lnRef idx="2">
+            <a:schemeClr val="accent1">
+              <a:shade val="50000"/>
+            </a:schemeClr>
+          </a:lnRef>
+          <a:fillRef idx="1">
+            <a:schemeClr val="accent1"/>
+          </a:fillRef>
+          <a:effectRef idx="0">
+            <a:schemeClr val="accent1"/>
+          </a:effectRef>
+          <a:fontRef idx="minor">
+            <a:schemeClr val="lt1"/>
+          </a:fontRef>
+        </p:style>
+        <p:txBody>
+          <a:bodyPr rtlCol="0" anchor="ctr"/>
+          <a:lstStyle/>
+          <a:p>
+            <a:pPr algn="ctr"/>
+            <a:endParaRPr lang="en-US"/>
+          </a:p>
+        </p:txBody>
+      </p:sp>
+      <p:sp>
+        <p:nvSpPr>
+          <p:cNvPr id="14" name="Oval 13">
+            <a:extLst>
+              <a:ext uri="{FF2B5EF4-FFF2-40B4-BE49-F238E27FC236}">
+                <a16:creationId xmlns:a16="http://schemas.microsoft.com/office/drawing/2014/main" id="{4A68F011-5B5A-4B08-8742-D35667696780}"/>
+              </a:ext>
+            </a:extLst>
+          </p:cNvPr>
+          <p:cNvSpPr/>
+          <p:nvPr/>
+        </p:nvSpPr>
+        <p:spPr>
+          <a:xfrm>
+            <a:off x="6853870" y="4695561"/>
+            <a:ext cx="313038" cy="296562"/>
+          </a:xfrm>
+          <a:prstGeom prst="ellipse">
+            <a:avLst/>
+          </a:prstGeom>
+          <a:solidFill>
+            <a:schemeClr val="accent3"/>
+          </a:solidFill>
+          <a:ln>
+            <a:solidFill>
+              <a:schemeClr val="accent3">
+                <a:lumMod val="60000"/>
+                <a:lumOff val="40000"/>
+              </a:schemeClr>
+            </a:solidFill>
+          </a:ln>
+        </p:spPr>
+        <p:style>
+          <a:lnRef idx="2">
+            <a:schemeClr val="accent1">
+              <a:shade val="50000"/>
+            </a:schemeClr>
+          </a:lnRef>
+          <a:fillRef idx="1">
+            <a:schemeClr val="accent1"/>
+          </a:fillRef>
+          <a:effectRef idx="0">
+            <a:schemeClr val="accent1"/>
+          </a:effectRef>
+          <a:fontRef idx="minor">
+            <a:schemeClr val="lt1"/>
+          </a:fontRef>
+        </p:style>
+        <p:txBody>
+          <a:bodyPr rtlCol="0" anchor="ctr"/>
+          <a:lstStyle/>
+          <a:p>
+            <a:pPr algn="ctr"/>
+            <a:endParaRPr lang="en-US"/>
+          </a:p>
+        </p:txBody>
+      </p:sp>
+      <p:sp>
+        <p:nvSpPr>
+          <p:cNvPr id="15" name="Oval 14">
+            <a:extLst>
+              <a:ext uri="{FF2B5EF4-FFF2-40B4-BE49-F238E27FC236}">
+                <a16:creationId xmlns:a16="http://schemas.microsoft.com/office/drawing/2014/main" id="{13C2139E-F2A3-4AB2-903F-C669EE3629D1}"/>
+              </a:ext>
+            </a:extLst>
+          </p:cNvPr>
+          <p:cNvSpPr/>
+          <p:nvPr/>
+        </p:nvSpPr>
+        <p:spPr>
+          <a:xfrm>
+            <a:off x="5539934" y="2199503"/>
+            <a:ext cx="313038" cy="296562"/>
+          </a:xfrm>
+          <a:prstGeom prst="ellipse">
+            <a:avLst/>
+          </a:prstGeom>
+          <a:solidFill>
+            <a:schemeClr val="accent3"/>
+          </a:solidFill>
+          <a:ln>
+            <a:solidFill>
+              <a:schemeClr val="accent3">
+                <a:lumMod val="60000"/>
+                <a:lumOff val="40000"/>
+              </a:schemeClr>
+            </a:solidFill>
+          </a:ln>
+        </p:spPr>
+        <p:style>
+          <a:lnRef idx="2">
+            <a:schemeClr val="accent1">
+              <a:shade val="50000"/>
+            </a:schemeClr>
+          </a:lnRef>
+          <a:fillRef idx="1">
+            <a:schemeClr val="accent1"/>
+          </a:fillRef>
+          <a:effectRef idx="0">
+            <a:schemeClr val="accent1"/>
+          </a:effectRef>
+          <a:fontRef idx="minor">
+            <a:schemeClr val="lt1"/>
+          </a:fontRef>
+        </p:style>
+        <p:txBody>
+          <a:bodyPr rtlCol="0" anchor="ctr"/>
+          <a:lstStyle/>
+          <a:p>
+            <a:pPr algn="ctr"/>
+            <a:endParaRPr lang="en-US"/>
+          </a:p>
+        </p:txBody>
+      </p:sp>
+      <p:sp>
+        <p:nvSpPr>
+          <p:cNvPr id="16" name="Oval 15">
+            <a:extLst>
+              <a:ext uri="{FF2B5EF4-FFF2-40B4-BE49-F238E27FC236}">
+                <a16:creationId xmlns:a16="http://schemas.microsoft.com/office/drawing/2014/main" id="{EDC1A8E6-A577-491C-82C2-6BB854376584}"/>
+              </a:ext>
+            </a:extLst>
+          </p:cNvPr>
+          <p:cNvSpPr/>
+          <p:nvPr/>
+        </p:nvSpPr>
+        <p:spPr>
+          <a:xfrm>
+            <a:off x="6730288" y="2061516"/>
+            <a:ext cx="313038" cy="296562"/>
+          </a:xfrm>
+          <a:prstGeom prst="ellipse">
+            <a:avLst/>
+          </a:prstGeom>
+          <a:solidFill>
+            <a:schemeClr val="accent3"/>
+          </a:solidFill>
+          <a:ln>
+            <a:solidFill>
+              <a:schemeClr val="accent3">
+                <a:lumMod val="60000"/>
+                <a:lumOff val="40000"/>
+              </a:schemeClr>
+            </a:solidFill>
+          </a:ln>
+        </p:spPr>
+        <p:style>
+          <a:lnRef idx="2">
+            <a:schemeClr val="accent1">
+              <a:shade val="50000"/>
+            </a:schemeClr>
+          </a:lnRef>
+          <a:fillRef idx="1">
+            <a:schemeClr val="accent1"/>
+          </a:fillRef>
+          <a:effectRef idx="0">
+            <a:schemeClr val="accent1"/>
+          </a:effectRef>
+          <a:fontRef idx="minor">
+            <a:schemeClr val="lt1"/>
+          </a:fontRef>
+        </p:style>
+        <p:txBody>
+          <a:bodyPr rtlCol="0" anchor="ctr"/>
+          <a:lstStyle/>
+          <a:p>
+            <a:pPr algn="ctr"/>
+            <a:endParaRPr lang="en-US"/>
+          </a:p>
+        </p:txBody>
+      </p:sp>
+      <p:sp>
+        <p:nvSpPr>
+          <p:cNvPr id="18" name="Oval 17">
+            <a:extLst>
+              <a:ext uri="{FF2B5EF4-FFF2-40B4-BE49-F238E27FC236}">
+                <a16:creationId xmlns:a16="http://schemas.microsoft.com/office/drawing/2014/main" id="{4ED0E9BA-8A8B-40E3-9217-DED60B69C4E0}"/>
+              </a:ext>
+            </a:extLst>
+          </p:cNvPr>
+          <p:cNvSpPr/>
+          <p:nvPr/>
+        </p:nvSpPr>
+        <p:spPr>
+          <a:xfrm>
+            <a:off x="7613805" y="4098304"/>
+            <a:ext cx="313038" cy="296562"/>
+          </a:xfrm>
+          <a:prstGeom prst="ellipse">
+            <a:avLst/>
+          </a:prstGeom>
+          <a:solidFill>
+            <a:schemeClr val="accent3"/>
+          </a:solidFill>
+          <a:ln>
+            <a:solidFill>
+              <a:schemeClr val="accent3">
+                <a:lumMod val="60000"/>
+                <a:lumOff val="40000"/>
+              </a:schemeClr>
+            </a:solidFill>
+          </a:ln>
+        </p:spPr>
+        <p:style>
+          <a:lnRef idx="2">
+            <a:schemeClr val="accent1">
+              <a:shade val="50000"/>
+            </a:schemeClr>
+          </a:lnRef>
+          <a:fillRef idx="1">
+            <a:schemeClr val="accent1"/>
+          </a:fillRef>
+          <a:effectRef idx="0">
+            <a:schemeClr val="accent1"/>
+          </a:effectRef>
+          <a:fontRef idx="minor">
+            <a:schemeClr val="lt1"/>
+          </a:fontRef>
+        </p:style>
+        <p:txBody>
+          <a:bodyPr rtlCol="0" anchor="ctr"/>
+          <a:lstStyle/>
+          <a:p>
+            <a:pPr algn="ctr"/>
+            <a:endParaRPr lang="en-US"/>
+          </a:p>
+        </p:txBody>
+      </p:sp>
+      <p:grpSp>
+        <p:nvGrpSpPr>
+          <p:cNvPr id="27" name="Group 26">
+            <a:extLst>
+              <a:ext uri="{FF2B5EF4-FFF2-40B4-BE49-F238E27FC236}">
+                <a16:creationId xmlns:a16="http://schemas.microsoft.com/office/drawing/2014/main" id="{35FEEF94-4512-4C7A-8AB7-3F4C9AB95BFC}"/>
+              </a:ext>
+            </a:extLst>
+          </p:cNvPr>
+          <p:cNvGrpSpPr/>
+          <p:nvPr/>
+        </p:nvGrpSpPr>
+        <p:grpSpPr>
+          <a:xfrm>
+            <a:off x="2248931" y="3094760"/>
+            <a:ext cx="914400" cy="914400"/>
+            <a:chOff x="734574" y="3266302"/>
+            <a:chExt cx="914400" cy="914400"/>
+          </a:xfrm>
+        </p:grpSpPr>
+        <p:pic>
+          <p:nvPicPr>
+            <p:cNvPr id="21" name="Graphic 20" descr="Dog">
+              <a:extLst>
+                <a:ext uri="{FF2B5EF4-FFF2-40B4-BE49-F238E27FC236}">
+                  <a16:creationId xmlns:a16="http://schemas.microsoft.com/office/drawing/2014/main" id="{B11D3EE9-1A6C-4CFF-BB34-7FF8B6C5E3F8}"/>
+                </a:ext>
+              </a:extLst>
+            </p:cNvPr>
+            <p:cNvPicPr>
+              <a:picLocks noChangeAspect="1"/>
+            </p:cNvPicPr>
+            <p:nvPr/>
+          </p:nvPicPr>
+          <p:blipFill>
+            <a:blip r:embed="rId2">
+              <a:extLst>
+                <a:ext uri="{96DAC541-7B7A-43D3-8B79-37D633B846F1}">
+                  <asvg:svgBlip xmlns:asvg="http://schemas.microsoft.com/office/drawing/2016/SVG/main" r:embed="rId3"/>
+                </a:ext>
+              </a:extLst>
+            </a:blip>
+            <a:stretch>
+              <a:fillRect/>
+            </a:stretch>
+          </p:blipFill>
+          <p:spPr>
+            <a:xfrm rot="20965205">
+              <a:off x="734574" y="3266302"/>
+              <a:ext cx="914400" cy="914400"/>
+            </a:xfrm>
+            <a:prstGeom prst="rect">
+              <a:avLst/>
+            </a:prstGeom>
+          </p:spPr>
+        </p:pic>
+        <p:cxnSp>
+          <p:nvCxnSpPr>
+            <p:cNvPr id="25" name="Straight Connector 24">
+              <a:extLst>
+                <a:ext uri="{FF2B5EF4-FFF2-40B4-BE49-F238E27FC236}">
+                  <a16:creationId xmlns:a16="http://schemas.microsoft.com/office/drawing/2014/main" id="{8E6AA542-66D9-4EC9-8192-4787BC968C91}"/>
+                </a:ext>
+              </a:extLst>
+            </p:cNvPr>
+            <p:cNvCxnSpPr/>
+            <p:nvPr/>
+          </p:nvCxnSpPr>
+          <p:spPr>
+            <a:xfrm>
+              <a:off x="1235676" y="3534032"/>
+              <a:ext cx="156519" cy="98854"/>
+            </a:xfrm>
+            <a:prstGeom prst="line">
+              <a:avLst/>
+            </a:prstGeom>
+            <a:ln w="38100">
+              <a:solidFill>
+                <a:schemeClr val="tx2"/>
+              </a:solidFill>
+            </a:ln>
+          </p:spPr>
+          <p:style>
+            <a:lnRef idx="1">
+              <a:schemeClr val="accent1"/>
+            </a:lnRef>
+            <a:fillRef idx="0">
+              <a:schemeClr val="accent1"/>
+            </a:fillRef>
+            <a:effectRef idx="0">
+              <a:schemeClr val="accent1"/>
+            </a:effectRef>
+            <a:fontRef idx="minor">
+              <a:schemeClr val="tx1"/>
+            </a:fontRef>
+          </p:style>
+        </p:cxnSp>
+      </p:grpSp>
+      <p:pic>
+        <p:nvPicPr>
+          <p:cNvPr id="29" name="Graphic 28" descr="Wi-Fi">
+            <a:extLst>
+              <a:ext uri="{FF2B5EF4-FFF2-40B4-BE49-F238E27FC236}">
+                <a16:creationId xmlns:a16="http://schemas.microsoft.com/office/drawing/2014/main" id="{2B0BA56A-0C50-4C84-AFE0-2683FC06C7F4}"/>
+              </a:ext>
+            </a:extLst>
+          </p:cNvPr>
+          <p:cNvPicPr>
+            <a:picLocks noChangeAspect="1"/>
+          </p:cNvPicPr>
+          <p:nvPr/>
+        </p:nvPicPr>
+        <p:blipFill>
+          <a:blip r:embed="rId4">
+            <a:extLst>
+              <a:ext uri="{96DAC541-7B7A-43D3-8B79-37D633B846F1}">
+                <asvg:svgBlip xmlns:asvg="http://schemas.microsoft.com/office/drawing/2016/SVG/main" r:embed="rId5"/>
+              </a:ext>
+            </a:extLst>
+          </a:blip>
+          <a:stretch>
+            <a:fillRect/>
+          </a:stretch>
+        </p:blipFill>
+        <p:spPr>
+          <a:xfrm rot="10030935">
+            <a:off x="2292833" y="2483708"/>
+            <a:ext cx="914400" cy="914400"/>
+          </a:xfrm>
+          <a:prstGeom prst="rect">
+            <a:avLst/>
+          </a:prstGeom>
+        </p:spPr>
+      </p:pic>
+      <p:pic>
+        <p:nvPicPr>
+          <p:cNvPr id="30" name="Graphic 29" descr="Wi-Fi">
+            <a:extLst>
+              <a:ext uri="{FF2B5EF4-FFF2-40B4-BE49-F238E27FC236}">
+                <a16:creationId xmlns:a16="http://schemas.microsoft.com/office/drawing/2014/main" id="{E7D315FF-92B0-4693-8FC1-D6C439B85ABF}"/>
+              </a:ext>
+            </a:extLst>
+          </p:cNvPr>
+          <p:cNvPicPr>
+            <a:picLocks noChangeAspect="1"/>
+          </p:cNvPicPr>
+          <p:nvPr/>
+        </p:nvPicPr>
+        <p:blipFill>
+          <a:blip r:embed="rId4">
+            <a:extLst>
+              <a:ext uri="{96DAC541-7B7A-43D3-8B79-37D633B846F1}">
+                <asvg:svgBlip xmlns:asvg="http://schemas.microsoft.com/office/drawing/2016/SVG/main" r:embed="rId5"/>
+              </a:ext>
+            </a:extLst>
+          </a:blip>
+          <a:stretch>
+            <a:fillRect/>
+          </a:stretch>
+        </p:blipFill>
+        <p:spPr>
+          <a:xfrm rot="20547500">
+            <a:off x="2394118" y="3812904"/>
+            <a:ext cx="914400" cy="914400"/>
+          </a:xfrm>
+          <a:prstGeom prst="rect">
+            <a:avLst/>
+          </a:prstGeom>
+        </p:spPr>
+      </p:pic>
+    </p:spTree>
+    <p:extLst>
+      <p:ext uri="{BB962C8B-B14F-4D97-AF65-F5344CB8AC3E}">
+        <p14:creationId xmlns:p14="http://schemas.microsoft.com/office/powerpoint/2010/main" val="1333208345"/>
+      </p:ext>
+    </p:extLst>
+  </p:cSld>
+  <p:clrMapOvr>
+    <a:masterClrMapping/>
+  </p:clrMapOvr>
+  <mc:AlternateContent xmlns:mc="http://schemas.openxmlformats.org/markup-compatibility/2006" xmlns:p159="http://schemas.microsoft.com/office/powerpoint/2015/09/main">
+    <mc:Choice Requires="p159">
+      <p:transition xmlns:p14="http://schemas.microsoft.com/office/powerpoint/2010/main" spd="slow" p14:dur="2000">
+        <p159:morph option="byObject"/>
+      </p:transition>
+    </mc:Choice>
+    <mc:Fallback xmlns="">
+      <p:transition spd="slow">
+        <p:fade/>
+      </p:transition>
+    </mc:Fallback>
+  </mc:AlternateContent>
 </p:sld>
 </file>
 
